--- a/kapustnic.pptx
+++ b/kapustnic.pptx
@@ -3540,6 +3540,59 @@
           </a:prstGeom>
         </p:spPr>
       </p:pic>
+      <p:sp>
+        <p:nvSpPr>
+          <p:cNvPr id="5" name="TextBox 4"/>
+          <p:cNvSpPr txBox="1"/>
+          <p:nvPr/>
+        </p:nvSpPr>
+        <p:spPr>
+          <a:xfrm>
+            <a:off x="0" y="1892143"/>
+            <a:ext cx="9144000" cy="1015663"/>
+          </a:xfrm>
+          <a:prstGeom prst="rect">
+            <a:avLst/>
+          </a:prstGeom>
+          <a:noFill/>
+        </p:spPr>
+        <p:txBody>
+          <a:bodyPr wrap="square" rtlCol="0">
+            <a:spAutoFit/>
+          </a:bodyPr>
+          <a:lstStyle/>
+          <a:p>
+            <a:pPr algn="ctr"/>
+            <a:r>
+              <a:rPr lang="ru-RU" sz="6000" b="1" i="1" dirty="0" smtClean="0">
+                <a:solidFill>
+                  <a:schemeClr val="bg1"/>
+                </a:solidFill>
+                <a:latin typeface="Wolgast Two Bold" pitchFamily="66" charset="0"/>
+              </a:rPr>
+              <a:t>Последний</a:t>
+            </a:r>
+            <a:r>
+              <a:rPr lang="ru-RU" sz="6000" b="1" i="1" dirty="0">
+                <a:solidFill>
+                  <a:schemeClr val="bg1"/>
+                </a:solidFill>
+                <a:latin typeface="Wolgast Two Bold" pitchFamily="66" charset="0"/>
+              </a:rPr>
+              <a:t> </a:t>
+            </a:r>
+            <a:r>
+              <a:rPr lang="ru-RU" sz="6000" b="1" i="1" dirty="0" smtClean="0">
+                <a:solidFill>
+                  <a:schemeClr val="bg1"/>
+                </a:solidFill>
+                <a:latin typeface="Wolgast Two Bold" pitchFamily="66" charset="0"/>
+              </a:rPr>
+              <a:t>звонок</a:t>
+            </a:r>
+          </a:p>
+        </p:txBody>
+      </p:sp>
     </p:spTree>
     <p:extLst>
       <p:ext uri="{BB962C8B-B14F-4D97-AF65-F5344CB8AC3E}">

--- a/kapustnic.pptx
+++ b/kapustnic.pptx
@@ -5,10 +5,13 @@
     <p:sldMasterId id="2147483648" r:id="rId1"/>
   </p:sldMasterIdLst>
   <p:notesMasterIdLst>
-    <p:notesMasterId r:id="rId3"/>
+    <p:notesMasterId r:id="rId6"/>
   </p:notesMasterIdLst>
   <p:sldIdLst>
     <p:sldId id="256" r:id="rId2"/>
+    <p:sldId id="257" r:id="rId3"/>
+    <p:sldId id="258" r:id="rId4"/>
+    <p:sldId id="259" r:id="rId5"/>
   </p:sldIdLst>
   <p:sldSz cx="9144000" cy="6858000" type="screen4x3"/>
   <p:notesSz cx="6858000" cy="9144000"/>
@@ -3597,6 +3600,339 @@
     <p:extLst>
       <p:ext uri="{BB962C8B-B14F-4D97-AF65-F5344CB8AC3E}">
         <p14:creationId xmlns:p14="http://schemas.microsoft.com/office/powerpoint/2010/main" val="926787552"/>
+      </p:ext>
+    </p:extLst>
+  </p:cSld>
+  <p:clrMapOvr>
+    <a:masterClrMapping/>
+  </p:clrMapOvr>
+  <p:timing>
+    <p:tnLst>
+      <p:par>
+        <p:cTn id="1" dur="indefinite" restart="never" nodeType="tmRoot"/>
+      </p:par>
+    </p:tnLst>
+  </p:timing>
+</p:sld>
+</file>
+
+<file path=ppt/slides/slide2.xml><?xml version="1.0" encoding="utf-8"?>
+<p:sld xmlns:a="http://schemas.openxmlformats.org/drawingml/2006/main" xmlns:r="http://schemas.openxmlformats.org/officeDocument/2006/relationships" xmlns:p="http://schemas.openxmlformats.org/presentationml/2006/main">
+  <p:cSld>
+    <p:spTree>
+      <p:nvGrpSpPr>
+        <p:cNvPr id="1" name=""/>
+        <p:cNvGrpSpPr/>
+        <p:nvPr/>
+      </p:nvGrpSpPr>
+      <p:grpSpPr>
+        <a:xfrm>
+          <a:off x="0" y="0"/>
+          <a:ext cx="0" cy="0"/>
+          <a:chOff x="0" y="0"/>
+          <a:chExt cx="0" cy="0"/>
+        </a:xfrm>
+      </p:grpSpPr>
+      <p:sp>
+        <p:nvSpPr>
+          <p:cNvPr id="2" name="Заголовок 1"/>
+          <p:cNvSpPr>
+            <a:spLocks noGrp="1"/>
+          </p:cNvSpPr>
+          <p:nvPr>
+            <p:ph type="title"/>
+          </p:nvPr>
+        </p:nvSpPr>
+        <p:spPr/>
+        <p:txBody>
+          <a:bodyPr/>
+          <a:lstStyle/>
+          <a:p>
+            <a:endParaRPr lang="ru-RU"/>
+          </a:p>
+        </p:txBody>
+      </p:sp>
+      <p:sp>
+        <p:nvSpPr>
+          <p:cNvPr id="3" name="Объект 2"/>
+          <p:cNvSpPr>
+            <a:spLocks noGrp="1"/>
+          </p:cNvSpPr>
+          <p:nvPr>
+            <p:ph idx="1"/>
+          </p:nvPr>
+        </p:nvSpPr>
+        <p:spPr/>
+        <p:txBody>
+          <a:bodyPr/>
+          <a:lstStyle/>
+          <a:p>
+            <a:endParaRPr lang="ru-RU"/>
+          </a:p>
+        </p:txBody>
+      </p:sp>
+    </p:spTree>
+    <p:extLst>
+      <p:ext uri="{BB962C8B-B14F-4D97-AF65-F5344CB8AC3E}">
+        <p14:creationId xmlns:p14="http://schemas.microsoft.com/office/powerpoint/2010/main" val="32827528"/>
+      </p:ext>
+    </p:extLst>
+  </p:cSld>
+  <p:clrMapOvr>
+    <a:masterClrMapping/>
+  </p:clrMapOvr>
+  <p:timing>
+    <p:tnLst>
+      <p:par>
+        <p:cTn id="1" dur="indefinite" restart="never" nodeType="tmRoot"/>
+      </p:par>
+    </p:tnLst>
+  </p:timing>
+</p:sld>
+</file>
+
+<file path=ppt/slides/slide3.xml><?xml version="1.0" encoding="utf-8"?>
+<p:sld xmlns:a="http://schemas.openxmlformats.org/drawingml/2006/main" xmlns:r="http://schemas.openxmlformats.org/officeDocument/2006/relationships" xmlns:p="http://schemas.openxmlformats.org/presentationml/2006/main">
+  <p:cSld>
+    <p:spTree>
+      <p:nvGrpSpPr>
+        <p:cNvPr id="1" name=""/>
+        <p:cNvGrpSpPr/>
+        <p:nvPr/>
+      </p:nvGrpSpPr>
+      <p:grpSpPr>
+        <a:xfrm>
+          <a:off x="0" y="0"/>
+          <a:ext cx="0" cy="0"/>
+          <a:chOff x="0" y="0"/>
+          <a:chExt cx="0" cy="0"/>
+        </a:xfrm>
+      </p:grpSpPr>
+      <p:sp>
+        <p:nvSpPr>
+          <p:cNvPr id="2" name="Заголовок 1"/>
+          <p:cNvSpPr>
+            <a:spLocks noGrp="1"/>
+          </p:cNvSpPr>
+          <p:nvPr>
+            <p:ph type="title"/>
+          </p:nvPr>
+        </p:nvSpPr>
+        <p:spPr/>
+        <p:txBody>
+          <a:bodyPr/>
+          <a:lstStyle/>
+          <a:p>
+            <a:endParaRPr lang="ru-RU"/>
+          </a:p>
+        </p:txBody>
+      </p:sp>
+      <p:pic>
+        <p:nvPicPr>
+          <p:cNvPr id="4" name="Объект 3"/>
+          <p:cNvPicPr>
+            <a:picLocks noGrp="1" noChangeAspect="1"/>
+          </p:cNvPicPr>
+          <p:nvPr>
+            <p:ph idx="1"/>
+          </p:nvPr>
+        </p:nvPicPr>
+        <p:blipFill>
+          <a:blip r:embed="rId2">
+            <a:extLst>
+              <a:ext uri="{28A0092B-C50C-407E-A947-70E740481C1C}">
+                <a14:useLocalDpi xmlns:a14="http://schemas.microsoft.com/office/drawing/2010/main" val="0"/>
+              </a:ext>
+            </a:extLst>
+          </a:blip>
+          <a:stretch>
+            <a:fillRect/>
+          </a:stretch>
+        </p:blipFill>
+        <p:spPr>
+          <a:xfrm>
+            <a:off x="-27344" y="14768"/>
+            <a:ext cx="9144000" cy="6858000"/>
+          </a:xfrm>
+        </p:spPr>
+      </p:pic>
+    </p:spTree>
+    <p:extLst>
+      <p:ext uri="{BB962C8B-B14F-4D97-AF65-F5344CB8AC3E}">
+        <p14:creationId xmlns:p14="http://schemas.microsoft.com/office/powerpoint/2010/main" val="2315162918"/>
+      </p:ext>
+    </p:extLst>
+  </p:cSld>
+  <p:clrMapOvr>
+    <a:masterClrMapping/>
+  </p:clrMapOvr>
+  <p:timing>
+    <p:tnLst>
+      <p:par>
+        <p:cTn id="1" dur="indefinite" restart="never" nodeType="tmRoot"/>
+      </p:par>
+    </p:tnLst>
+  </p:timing>
+</p:sld>
+</file>
+
+<file path=ppt/slides/slide4.xml><?xml version="1.0" encoding="utf-8"?>
+<p:sld xmlns:a="http://schemas.openxmlformats.org/drawingml/2006/main" xmlns:r="http://schemas.openxmlformats.org/officeDocument/2006/relationships" xmlns:p="http://schemas.openxmlformats.org/presentationml/2006/main">
+  <p:cSld>
+    <p:spTree>
+      <p:nvGrpSpPr>
+        <p:cNvPr id="1" name=""/>
+        <p:cNvGrpSpPr/>
+        <p:nvPr/>
+      </p:nvGrpSpPr>
+      <p:grpSpPr>
+        <a:xfrm>
+          <a:off x="0" y="0"/>
+          <a:ext cx="0" cy="0"/>
+          <a:chOff x="0" y="0"/>
+          <a:chExt cx="0" cy="0"/>
+        </a:xfrm>
+      </p:grpSpPr>
+      <p:sp>
+        <p:nvSpPr>
+          <p:cNvPr id="2" name="Заголовок 1"/>
+          <p:cNvSpPr>
+            <a:spLocks noGrp="1"/>
+          </p:cNvSpPr>
+          <p:nvPr>
+            <p:ph type="title"/>
+          </p:nvPr>
+        </p:nvSpPr>
+        <p:spPr/>
+        <p:txBody>
+          <a:bodyPr/>
+          <a:lstStyle/>
+          <a:p>
+            <a:endParaRPr lang="ru-RU"/>
+          </a:p>
+        </p:txBody>
+      </p:sp>
+      <p:sp>
+        <p:nvSpPr>
+          <p:cNvPr id="3" name="Объект 2"/>
+          <p:cNvSpPr>
+            <a:spLocks noGrp="1"/>
+          </p:cNvSpPr>
+          <p:nvPr>
+            <p:ph idx="1"/>
+          </p:nvPr>
+        </p:nvSpPr>
+        <p:spPr/>
+        <p:txBody>
+          <a:bodyPr/>
+          <a:lstStyle/>
+          <a:p>
+            <a:endParaRPr lang="ru-RU"/>
+          </a:p>
+        </p:txBody>
+      </p:sp>
+      <p:sp>
+        <p:nvSpPr>
+          <p:cNvPr id="4" name="Прямоугольник 3"/>
+          <p:cNvSpPr/>
+          <p:nvPr/>
+        </p:nvSpPr>
+        <p:spPr>
+          <a:xfrm>
+            <a:off x="0" y="0"/>
+            <a:ext cx="9144000" cy="6858000"/>
+          </a:xfrm>
+          <a:prstGeom prst="rect">
+            <a:avLst/>
+          </a:prstGeom>
+          <a:solidFill>
+            <a:schemeClr val="tx1"/>
+          </a:solidFill>
+          <a:ln w="76200">
+            <a:solidFill>
+              <a:schemeClr val="tx1"/>
+            </a:solidFill>
+          </a:ln>
+        </p:spPr>
+        <p:style>
+          <a:lnRef idx="2">
+            <a:schemeClr val="accent1">
+              <a:shade val="50000"/>
+            </a:schemeClr>
+          </a:lnRef>
+          <a:fillRef idx="1">
+            <a:schemeClr val="accent1"/>
+          </a:fillRef>
+          <a:effectRef idx="0">
+            <a:schemeClr val="accent1"/>
+          </a:effectRef>
+          <a:fontRef idx="minor">
+            <a:schemeClr val="lt1"/>
+          </a:fontRef>
+        </p:style>
+        <p:txBody>
+          <a:bodyPr rtlCol="0" anchor="ctr"/>
+          <a:lstStyle/>
+          <a:p>
+            <a:pPr algn="ctr"/>
+            <a:endParaRPr lang="ru-RU"/>
+          </a:p>
+        </p:txBody>
+      </p:sp>
+      <p:sp>
+        <p:nvSpPr>
+          <p:cNvPr id="5" name="TextBox 4"/>
+          <p:cNvSpPr txBox="1"/>
+          <p:nvPr/>
+        </p:nvSpPr>
+        <p:spPr>
+          <a:xfrm>
+            <a:off x="9618" y="1196752"/>
+            <a:ext cx="9144000" cy="4154984"/>
+          </a:xfrm>
+          <a:prstGeom prst="rect">
+            <a:avLst/>
+          </a:prstGeom>
+          <a:noFill/>
+        </p:spPr>
+        <p:txBody>
+          <a:bodyPr wrap="square" rtlCol="0">
+            <a:spAutoFit/>
+          </a:bodyPr>
+          <a:lstStyle/>
+          <a:p>
+            <a:pPr algn="ctr"/>
+            <a:r>
+              <a:rPr lang="be-BY" sz="8800" dirty="0" smtClean="0">
+                <a:solidFill>
+                  <a:schemeClr val="bg1"/>
+                </a:solidFill>
+              </a:rPr>
+              <a:t>Тем временем в учительской</a:t>
+            </a:r>
+            <a:r>
+              <a:rPr lang="en-US" sz="8800" dirty="0" smtClean="0">
+                <a:solidFill>
+                  <a:schemeClr val="bg1"/>
+                </a:solidFill>
+              </a:rPr>
+              <a:t>:</a:t>
+            </a:r>
+          </a:p>
+          <a:p>
+            <a:pPr algn="ctr"/>
+            <a:endParaRPr lang="ru-RU" sz="8800" dirty="0">
+              <a:solidFill>
+                <a:schemeClr val="bg1"/>
+              </a:solidFill>
+            </a:endParaRPr>
+          </a:p>
+        </p:txBody>
+      </p:sp>
+    </p:spTree>
+    <p:extLst>
+      <p:ext uri="{BB962C8B-B14F-4D97-AF65-F5344CB8AC3E}">
+        <p14:creationId xmlns:p14="http://schemas.microsoft.com/office/powerpoint/2010/main" val="3346338673"/>
       </p:ext>
     </p:extLst>
   </p:cSld>

--- a/kapustnic.pptx
+++ b/kapustnic.pptx
@@ -5,13 +5,19 @@
     <p:sldMasterId id="2147483648" r:id="rId1"/>
   </p:sldMasterIdLst>
   <p:notesMasterIdLst>
-    <p:notesMasterId r:id="rId6"/>
+    <p:notesMasterId r:id="rId12"/>
   </p:notesMasterIdLst>
   <p:sldIdLst>
     <p:sldId id="256" r:id="rId2"/>
     <p:sldId id="257" r:id="rId3"/>
     <p:sldId id="258" r:id="rId4"/>
     <p:sldId id="259" r:id="rId5"/>
+    <p:sldId id="260" r:id="rId6"/>
+    <p:sldId id="261" r:id="rId7"/>
+    <p:sldId id="262" r:id="rId8"/>
+    <p:sldId id="263" r:id="rId9"/>
+    <p:sldId id="264" r:id="rId10"/>
+    <p:sldId id="265" r:id="rId11"/>
   </p:sldIdLst>
   <p:sldSz cx="9144000" cy="6858000" type="screen4x3"/>
   <p:notesSz cx="6858000" cy="9144000"/>
@@ -3551,7 +3557,7 @@
         </p:nvSpPr>
         <p:spPr>
           <a:xfrm>
-            <a:off x="0" y="1892143"/>
+            <a:off x="0" y="2921169"/>
             <a:ext cx="9144000" cy="1015663"/>
           </a:xfrm>
           <a:prstGeom prst="rect">
@@ -3600,6 +3606,43 @@
     <p:extLst>
       <p:ext uri="{BB962C8B-B14F-4D97-AF65-F5344CB8AC3E}">
         <p14:creationId xmlns:p14="http://schemas.microsoft.com/office/powerpoint/2010/main" val="926787552"/>
+      </p:ext>
+    </p:extLst>
+  </p:cSld>
+  <p:clrMapOvr>
+    <a:masterClrMapping/>
+  </p:clrMapOvr>
+  <p:timing>
+    <p:tnLst>
+      <p:par>
+        <p:cTn id="1" dur="indefinite" restart="never" nodeType="tmRoot"/>
+      </p:par>
+    </p:tnLst>
+  </p:timing>
+</p:sld>
+</file>
+
+<file path=ppt/slides/slide10.xml><?xml version="1.0" encoding="utf-8"?>
+<p:sld xmlns:a="http://schemas.openxmlformats.org/drawingml/2006/main" xmlns:r="http://schemas.openxmlformats.org/officeDocument/2006/relationships" xmlns:p="http://schemas.openxmlformats.org/presentationml/2006/main">
+  <p:cSld>
+    <p:spTree>
+      <p:nvGrpSpPr>
+        <p:cNvPr id="1" name=""/>
+        <p:cNvGrpSpPr/>
+        <p:nvPr/>
+      </p:nvGrpSpPr>
+      <p:grpSpPr>
+        <a:xfrm>
+          <a:off x="0" y="0"/>
+          <a:ext cx="0" cy="0"/>
+          <a:chOff x="0" y="0"/>
+          <a:chExt cx="0" cy="0"/>
+        </a:xfrm>
+      </p:grpSpPr>
+    </p:spTree>
+    <p:extLst>
+      <p:ext uri="{BB962C8B-B14F-4D97-AF65-F5344CB8AC3E}">
+        <p14:creationId xmlns:p14="http://schemas.microsoft.com/office/powerpoint/2010/main" val="3870790679"/>
       </p:ext>
     </p:extLst>
   </p:cSld>
@@ -3635,39 +3678,33 @@
       </p:grpSpPr>
       <p:sp>
         <p:nvSpPr>
-          <p:cNvPr id="2" name="Заголовок 1"/>
-          <p:cNvSpPr>
-            <a:spLocks noGrp="1"/>
-          </p:cNvSpPr>
-          <p:nvPr>
-            <p:ph type="title"/>
-          </p:nvPr>
-        </p:nvSpPr>
-        <p:spPr/>
-        <p:txBody>
-          <a:bodyPr/>
+          <p:cNvPr id="5" name="TextBox 4"/>
+          <p:cNvSpPr txBox="1"/>
+          <p:nvPr/>
+        </p:nvSpPr>
+        <p:spPr>
+          <a:xfrm>
+            <a:off x="1619672" y="1412776"/>
+            <a:ext cx="5040560" cy="3046988"/>
+          </a:xfrm>
+          <a:prstGeom prst="rect">
+            <a:avLst/>
+          </a:prstGeom>
+          <a:noFill/>
+        </p:spPr>
+        <p:txBody>
+          <a:bodyPr wrap="square" rtlCol="0">
+            <a:spAutoFit/>
+          </a:bodyPr>
           <a:lstStyle/>
           <a:p>
-            <a:endParaRPr lang="ru-RU"/>
-          </a:p>
-        </p:txBody>
-      </p:sp>
-      <p:sp>
-        <p:nvSpPr>
-          <p:cNvPr id="3" name="Объект 2"/>
-          <p:cNvSpPr>
-            <a:spLocks noGrp="1"/>
-          </p:cNvSpPr>
-          <p:nvPr>
-            <p:ph idx="1"/>
-          </p:nvPr>
-        </p:nvSpPr>
-        <p:spPr/>
-        <p:txBody>
-          <a:bodyPr/>
-          <a:lstStyle/>
-          <a:p>
-            <a:endParaRPr lang="ru-RU"/>
+            <a:r>
+              <a:rPr lang="ru-RU" sz="9600" dirty="0" smtClean="0"/>
+              <a:t>Видео</a:t>
+            </a:r>
+          </a:p>
+          <a:p>
+            <a:endParaRPr lang="ru-RU" sz="9600" dirty="0"/>
           </a:p>
         </p:txBody>
       </p:sp>
@@ -3887,7 +3924,7 @@
         </p:nvSpPr>
         <p:spPr>
           <a:xfrm>
-            <a:off x="9618" y="1196752"/>
+            <a:off x="0" y="1351508"/>
             <a:ext cx="9144000" cy="4154984"/>
           </a:xfrm>
           <a:prstGeom prst="rect">
@@ -3933,6 +3970,2488 @@
     <p:extLst>
       <p:ext uri="{BB962C8B-B14F-4D97-AF65-F5344CB8AC3E}">
         <p14:creationId xmlns:p14="http://schemas.microsoft.com/office/powerpoint/2010/main" val="3346338673"/>
+      </p:ext>
+    </p:extLst>
+  </p:cSld>
+  <p:clrMapOvr>
+    <a:masterClrMapping/>
+  </p:clrMapOvr>
+  <p:timing>
+    <p:tnLst>
+      <p:par>
+        <p:cTn id="1" dur="indefinite" restart="never" nodeType="tmRoot"/>
+      </p:par>
+    </p:tnLst>
+  </p:timing>
+</p:sld>
+</file>
+
+<file path=ppt/slides/slide5.xml><?xml version="1.0" encoding="utf-8"?>
+<p:sld xmlns:a="http://schemas.openxmlformats.org/drawingml/2006/main" xmlns:r="http://schemas.openxmlformats.org/officeDocument/2006/relationships" xmlns:p="http://schemas.openxmlformats.org/presentationml/2006/main">
+  <p:cSld>
+    <p:spTree>
+      <p:nvGrpSpPr>
+        <p:cNvPr id="1" name=""/>
+        <p:cNvGrpSpPr/>
+        <p:nvPr/>
+      </p:nvGrpSpPr>
+      <p:grpSpPr>
+        <a:xfrm>
+          <a:off x="0" y="0"/>
+          <a:ext cx="0" cy="0"/>
+          <a:chOff x="0" y="0"/>
+          <a:chExt cx="0" cy="0"/>
+        </a:xfrm>
+      </p:grpSpPr>
+      <p:sp>
+        <p:nvSpPr>
+          <p:cNvPr id="2" name="Заголовок 1"/>
+          <p:cNvSpPr>
+            <a:spLocks noGrp="1"/>
+          </p:cNvSpPr>
+          <p:nvPr>
+            <p:ph type="title"/>
+          </p:nvPr>
+        </p:nvSpPr>
+        <p:spPr>
+          <a:xfrm>
+            <a:off x="457200" y="260648"/>
+            <a:ext cx="8229600" cy="1143000"/>
+          </a:xfrm>
+        </p:spPr>
+        <p:txBody>
+          <a:bodyPr>
+            <a:noAutofit/>
+          </a:bodyPr>
+          <a:lstStyle/>
+          <a:p>
+            <a:r>
+              <a:rPr lang="be-BY" sz="9600" dirty="0" smtClean="0"/>
+              <a:t>Биология</a:t>
+            </a:r>
+            <a:endParaRPr lang="ru-RU" sz="9600" dirty="0"/>
+          </a:p>
+        </p:txBody>
+      </p:sp>
+      <p:sp>
+        <p:nvSpPr>
+          <p:cNvPr id="4" name="TextBox 3"/>
+          <p:cNvSpPr txBox="1"/>
+          <p:nvPr/>
+        </p:nvSpPr>
+        <p:spPr>
+          <a:xfrm>
+            <a:off x="0" y="1862132"/>
+            <a:ext cx="9144000" cy="523220"/>
+          </a:xfrm>
+          <a:prstGeom prst="rect">
+            <a:avLst/>
+          </a:prstGeom>
+          <a:noFill/>
+        </p:spPr>
+        <p:txBody>
+          <a:bodyPr wrap="square" rtlCol="0">
+            <a:spAutoFit/>
+          </a:bodyPr>
+          <a:lstStyle/>
+          <a:p>
+            <a:pPr algn="ctr"/>
+            <a:r>
+              <a:rPr lang="ru-RU" sz="2800" dirty="0" err="1" smtClean="0"/>
+              <a:t>Вашкевич</a:t>
+            </a:r>
+            <a:r>
+              <a:rPr lang="ru-RU" sz="2800" dirty="0" smtClean="0"/>
+              <a:t> Екатерина Леонидовна</a:t>
+            </a:r>
+            <a:endParaRPr lang="ru-RU" sz="2800" dirty="0"/>
+          </a:p>
+        </p:txBody>
+      </p:sp>
+      <p:pic>
+        <p:nvPicPr>
+          <p:cNvPr id="5" name="Рисунок 4"/>
+          <p:cNvPicPr>
+            <a:picLocks noChangeAspect="1"/>
+          </p:cNvPicPr>
+          <p:nvPr/>
+        </p:nvPicPr>
+        <p:blipFill>
+          <a:blip r:embed="rId2" cstate="print">
+            <a:extLst>
+              <a:ext uri="{28A0092B-C50C-407E-A947-70E740481C1C}">
+                <a14:useLocalDpi xmlns:a14="http://schemas.microsoft.com/office/drawing/2010/main" val="0"/>
+              </a:ext>
+            </a:extLst>
+          </a:blip>
+          <a:stretch>
+            <a:fillRect/>
+          </a:stretch>
+        </p:blipFill>
+        <p:spPr>
+          <a:xfrm>
+            <a:off x="3347864" y="2708920"/>
+            <a:ext cx="2009244" cy="3015043"/>
+          </a:xfrm>
+          <a:prstGeom prst="rect">
+            <a:avLst/>
+          </a:prstGeom>
+        </p:spPr>
+      </p:pic>
+    </p:spTree>
+    <p:extLst>
+      <p:ext uri="{BB962C8B-B14F-4D97-AF65-F5344CB8AC3E}">
+        <p14:creationId xmlns:p14="http://schemas.microsoft.com/office/powerpoint/2010/main" val="2913969601"/>
+      </p:ext>
+    </p:extLst>
+  </p:cSld>
+  <p:clrMapOvr>
+    <a:masterClrMapping/>
+  </p:clrMapOvr>
+  <mc:AlternateContent xmlns:mc="http://schemas.openxmlformats.org/markup-compatibility/2006">
+    <mc:Choice xmlns:p14="http://schemas.microsoft.com/office/powerpoint/2010/main" Requires="p14">
+      <p:transition p14:dur="10"/>
+    </mc:Choice>
+    <mc:Fallback>
+      <p:transition/>
+    </mc:Fallback>
+  </mc:AlternateContent>
+  <p:timing>
+    <p:tnLst>
+      <p:par>
+        <p:cTn id="1" dur="indefinite" restart="never" nodeType="tmRoot">
+          <p:childTnLst>
+            <p:seq concurrent="1" nextAc="seek">
+              <p:cTn id="2" dur="indefinite" nodeType="mainSeq">
+                <p:childTnLst>
+                  <p:par>
+                    <p:cTn id="3" fill="hold">
+                      <p:stCondLst>
+                        <p:cond delay="indefinite"/>
+                      </p:stCondLst>
+                      <p:childTnLst>
+                        <p:par>
+                          <p:cTn id="4" fill="hold">
+                            <p:stCondLst>
+                              <p:cond delay="0"/>
+                            </p:stCondLst>
+                            <p:childTnLst>
+                              <p:par>
+                                <p:cTn id="5" presetID="10" presetClass="entr" presetSubtype="0" fill="hold" nodeType="clickEffect">
+                                  <p:stCondLst>
+                                    <p:cond delay="0"/>
+                                  </p:stCondLst>
+                                  <p:childTnLst>
+                                    <p:set>
+                                      <p:cBhvr>
+                                        <p:cTn id="6" dur="1" fill="hold">
+                                          <p:stCondLst>
+                                            <p:cond delay="0"/>
+                                          </p:stCondLst>
+                                        </p:cTn>
+                                        <p:tgtEl>
+                                          <p:spTgt spid="5"/>
+                                        </p:tgtEl>
+                                        <p:attrNameLst>
+                                          <p:attrName>style.visibility</p:attrName>
+                                        </p:attrNameLst>
+                                      </p:cBhvr>
+                                      <p:to>
+                                        <p:strVal val="visible"/>
+                                      </p:to>
+                                    </p:set>
+                                    <p:animEffect transition="in" filter="fade">
+                                      <p:cBhvr>
+                                        <p:cTn id="7" dur="500"/>
+                                        <p:tgtEl>
+                                          <p:spTgt spid="5"/>
+                                        </p:tgtEl>
+                                      </p:cBhvr>
+                                    </p:animEffect>
+                                  </p:childTnLst>
+                                </p:cTn>
+                              </p:par>
+                              <p:par>
+                                <p:cTn id="8" presetID="10" presetClass="entr" presetSubtype="0" fill="hold" grpId="0" nodeType="withEffect">
+                                  <p:stCondLst>
+                                    <p:cond delay="0"/>
+                                  </p:stCondLst>
+                                  <p:childTnLst>
+                                    <p:set>
+                                      <p:cBhvr>
+                                        <p:cTn id="9" dur="1" fill="hold">
+                                          <p:stCondLst>
+                                            <p:cond delay="0"/>
+                                          </p:stCondLst>
+                                        </p:cTn>
+                                        <p:tgtEl>
+                                          <p:spTgt spid="4"/>
+                                        </p:tgtEl>
+                                        <p:attrNameLst>
+                                          <p:attrName>style.visibility</p:attrName>
+                                        </p:attrNameLst>
+                                      </p:cBhvr>
+                                      <p:to>
+                                        <p:strVal val="visible"/>
+                                      </p:to>
+                                    </p:set>
+                                    <p:animEffect transition="in" filter="fade">
+                                      <p:cBhvr>
+                                        <p:cTn id="10" dur="500"/>
+                                        <p:tgtEl>
+                                          <p:spTgt spid="4"/>
+                                        </p:tgtEl>
+                                      </p:cBhvr>
+                                    </p:animEffect>
+                                  </p:childTnLst>
+                                </p:cTn>
+                              </p:par>
+                            </p:childTnLst>
+                          </p:cTn>
+                        </p:par>
+                      </p:childTnLst>
+                    </p:cTn>
+                  </p:par>
+                </p:childTnLst>
+              </p:cTn>
+              <p:prevCondLst>
+                <p:cond evt="onPrev" delay="0">
+                  <p:tgtEl>
+                    <p:sldTgt/>
+                  </p:tgtEl>
+                </p:cond>
+              </p:prevCondLst>
+              <p:nextCondLst>
+                <p:cond evt="onNext" delay="0">
+                  <p:tgtEl>
+                    <p:sldTgt/>
+                  </p:tgtEl>
+                </p:cond>
+              </p:nextCondLst>
+            </p:seq>
+          </p:childTnLst>
+        </p:cTn>
+      </p:par>
+    </p:tnLst>
+    <p:bldLst>
+      <p:bldP spid="4" grpId="0"/>
+    </p:bldLst>
+  </p:timing>
+</p:sld>
+</file>
+
+<file path=ppt/slides/slide6.xml><?xml version="1.0" encoding="utf-8"?>
+<p:sld xmlns:a="http://schemas.openxmlformats.org/drawingml/2006/main" xmlns:r="http://schemas.openxmlformats.org/officeDocument/2006/relationships" xmlns:p="http://schemas.openxmlformats.org/presentationml/2006/main">
+  <p:cSld>
+    <p:spTree>
+      <p:nvGrpSpPr>
+        <p:cNvPr id="1" name=""/>
+        <p:cNvGrpSpPr/>
+        <p:nvPr/>
+      </p:nvGrpSpPr>
+      <p:grpSpPr>
+        <a:xfrm>
+          <a:off x="0" y="0"/>
+          <a:ext cx="0" cy="0"/>
+          <a:chOff x="0" y="0"/>
+          <a:chExt cx="0" cy="0"/>
+        </a:xfrm>
+      </p:grpSpPr>
+      <p:sp>
+        <p:nvSpPr>
+          <p:cNvPr id="2" name="Заголовок 1"/>
+          <p:cNvSpPr>
+            <a:spLocks noGrp="1"/>
+          </p:cNvSpPr>
+          <p:nvPr>
+            <p:ph type="title"/>
+          </p:nvPr>
+        </p:nvSpPr>
+        <p:spPr/>
+        <p:txBody>
+          <a:bodyPr>
+            <a:normAutofit fontScale="90000"/>
+          </a:bodyPr>
+          <a:lstStyle/>
+          <a:p>
+            <a:r>
+              <a:rPr lang="be-BY" sz="9600" dirty="0" smtClean="0"/>
+              <a:t>География</a:t>
+            </a:r>
+            <a:endParaRPr lang="ru-RU" sz="9600" dirty="0"/>
+          </a:p>
+        </p:txBody>
+      </p:sp>
+      <p:sp>
+        <p:nvSpPr>
+          <p:cNvPr id="4" name="TextBox 3"/>
+          <p:cNvSpPr txBox="1"/>
+          <p:nvPr/>
+        </p:nvSpPr>
+        <p:spPr>
+          <a:xfrm>
+            <a:off x="0" y="1629942"/>
+            <a:ext cx="9144000" cy="523220"/>
+          </a:xfrm>
+          <a:prstGeom prst="rect">
+            <a:avLst/>
+          </a:prstGeom>
+          <a:noFill/>
+        </p:spPr>
+        <p:txBody>
+          <a:bodyPr wrap="square" rtlCol="0">
+            <a:spAutoFit/>
+          </a:bodyPr>
+          <a:lstStyle/>
+          <a:p>
+            <a:pPr algn="ctr"/>
+            <a:r>
+              <a:rPr lang="ru-RU" sz="2800" dirty="0"/>
+              <a:t>Бурова Ольга Ивановна </a:t>
+            </a:r>
+            <a:endParaRPr lang="ru-RU" sz="2800" dirty="0" smtClean="0"/>
+          </a:p>
+        </p:txBody>
+      </p:sp>
+      <p:pic>
+        <p:nvPicPr>
+          <p:cNvPr id="5" name="Рисунок 4"/>
+          <p:cNvPicPr>
+            <a:picLocks noChangeAspect="1"/>
+          </p:cNvPicPr>
+          <p:nvPr/>
+        </p:nvPicPr>
+        <p:blipFill>
+          <a:blip r:embed="rId2" cstate="print">
+            <a:extLst>
+              <a:ext uri="{28A0092B-C50C-407E-A947-70E740481C1C}">
+                <a14:useLocalDpi xmlns:a14="http://schemas.microsoft.com/office/drawing/2010/main" val="0"/>
+              </a:ext>
+            </a:extLst>
+          </a:blip>
+          <a:stretch>
+            <a:fillRect/>
+          </a:stretch>
+        </p:blipFill>
+        <p:spPr>
+          <a:xfrm>
+            <a:off x="3491880" y="2492896"/>
+            <a:ext cx="1991978" cy="2989134"/>
+          </a:xfrm>
+          <a:prstGeom prst="rect">
+            <a:avLst/>
+          </a:prstGeom>
+        </p:spPr>
+      </p:pic>
+    </p:spTree>
+    <p:extLst>
+      <p:ext uri="{BB962C8B-B14F-4D97-AF65-F5344CB8AC3E}">
+        <p14:creationId xmlns:p14="http://schemas.microsoft.com/office/powerpoint/2010/main" val="3529264926"/>
+      </p:ext>
+    </p:extLst>
+  </p:cSld>
+  <p:clrMapOvr>
+    <a:masterClrMapping/>
+  </p:clrMapOvr>
+  <p:timing>
+    <p:tnLst>
+      <p:par>
+        <p:cTn id="1" dur="indefinite" restart="never" nodeType="tmRoot">
+          <p:childTnLst>
+            <p:seq concurrent="1" nextAc="seek">
+              <p:cTn id="2" dur="indefinite" nodeType="mainSeq">
+                <p:childTnLst>
+                  <p:par>
+                    <p:cTn id="3" fill="hold">
+                      <p:stCondLst>
+                        <p:cond delay="indefinite"/>
+                      </p:stCondLst>
+                      <p:childTnLst>
+                        <p:par>
+                          <p:cTn id="4" fill="hold">
+                            <p:stCondLst>
+                              <p:cond delay="0"/>
+                            </p:stCondLst>
+                            <p:childTnLst>
+                              <p:par>
+                                <p:cTn id="5" presetID="10" presetClass="entr" presetSubtype="0" fill="hold" grpId="0" nodeType="clickEffect">
+                                  <p:stCondLst>
+                                    <p:cond delay="0"/>
+                                  </p:stCondLst>
+                                  <p:childTnLst>
+                                    <p:set>
+                                      <p:cBhvr>
+                                        <p:cTn id="6" dur="1" fill="hold">
+                                          <p:stCondLst>
+                                            <p:cond delay="0"/>
+                                          </p:stCondLst>
+                                        </p:cTn>
+                                        <p:tgtEl>
+                                          <p:spTgt spid="4"/>
+                                        </p:tgtEl>
+                                        <p:attrNameLst>
+                                          <p:attrName>style.visibility</p:attrName>
+                                        </p:attrNameLst>
+                                      </p:cBhvr>
+                                      <p:to>
+                                        <p:strVal val="visible"/>
+                                      </p:to>
+                                    </p:set>
+                                    <p:animEffect transition="in" filter="fade">
+                                      <p:cBhvr>
+                                        <p:cTn id="7" dur="500"/>
+                                        <p:tgtEl>
+                                          <p:spTgt spid="4"/>
+                                        </p:tgtEl>
+                                      </p:cBhvr>
+                                    </p:animEffect>
+                                  </p:childTnLst>
+                                </p:cTn>
+                              </p:par>
+                              <p:par>
+                                <p:cTn id="8" presetID="10" presetClass="entr" presetSubtype="0" fill="hold" nodeType="withEffect">
+                                  <p:stCondLst>
+                                    <p:cond delay="0"/>
+                                  </p:stCondLst>
+                                  <p:childTnLst>
+                                    <p:set>
+                                      <p:cBhvr>
+                                        <p:cTn id="9" dur="1" fill="hold">
+                                          <p:stCondLst>
+                                            <p:cond delay="0"/>
+                                          </p:stCondLst>
+                                        </p:cTn>
+                                        <p:tgtEl>
+                                          <p:spTgt spid="5"/>
+                                        </p:tgtEl>
+                                        <p:attrNameLst>
+                                          <p:attrName>style.visibility</p:attrName>
+                                        </p:attrNameLst>
+                                      </p:cBhvr>
+                                      <p:to>
+                                        <p:strVal val="visible"/>
+                                      </p:to>
+                                    </p:set>
+                                    <p:animEffect transition="in" filter="fade">
+                                      <p:cBhvr>
+                                        <p:cTn id="10" dur="500"/>
+                                        <p:tgtEl>
+                                          <p:spTgt spid="5"/>
+                                        </p:tgtEl>
+                                      </p:cBhvr>
+                                    </p:animEffect>
+                                  </p:childTnLst>
+                                </p:cTn>
+                              </p:par>
+                            </p:childTnLst>
+                          </p:cTn>
+                        </p:par>
+                      </p:childTnLst>
+                    </p:cTn>
+                  </p:par>
+                </p:childTnLst>
+              </p:cTn>
+              <p:prevCondLst>
+                <p:cond evt="onPrev" delay="0">
+                  <p:tgtEl>
+                    <p:sldTgt/>
+                  </p:tgtEl>
+                </p:cond>
+              </p:prevCondLst>
+              <p:nextCondLst>
+                <p:cond evt="onNext" delay="0">
+                  <p:tgtEl>
+                    <p:sldTgt/>
+                  </p:tgtEl>
+                </p:cond>
+              </p:nextCondLst>
+            </p:seq>
+          </p:childTnLst>
+        </p:cTn>
+      </p:par>
+    </p:tnLst>
+    <p:bldLst>
+      <p:bldP spid="4" grpId="0"/>
+    </p:bldLst>
+  </p:timing>
+</p:sld>
+</file>
+
+<file path=ppt/slides/slide7.xml><?xml version="1.0" encoding="utf-8"?>
+<p:sld xmlns:a="http://schemas.openxmlformats.org/drawingml/2006/main" xmlns:r="http://schemas.openxmlformats.org/officeDocument/2006/relationships" xmlns:p="http://schemas.openxmlformats.org/presentationml/2006/main">
+  <p:cSld>
+    <p:spTree>
+      <p:nvGrpSpPr>
+        <p:cNvPr id="1" name=""/>
+        <p:cNvGrpSpPr/>
+        <p:nvPr/>
+      </p:nvGrpSpPr>
+      <p:grpSpPr>
+        <a:xfrm>
+          <a:off x="0" y="0"/>
+          <a:ext cx="0" cy="0"/>
+          <a:chOff x="0" y="0"/>
+          <a:chExt cx="0" cy="0"/>
+        </a:xfrm>
+      </p:grpSpPr>
+      <p:sp>
+        <p:nvSpPr>
+          <p:cNvPr id="2" name="Заголовок 1"/>
+          <p:cNvSpPr>
+            <a:spLocks noGrp="1"/>
+          </p:cNvSpPr>
+          <p:nvPr>
+            <p:ph type="title"/>
+          </p:nvPr>
+        </p:nvSpPr>
+        <p:spPr/>
+        <p:txBody>
+          <a:bodyPr>
+            <a:noAutofit/>
+          </a:bodyPr>
+          <a:lstStyle/>
+          <a:p>
+            <a:r>
+              <a:rPr lang="be-BY" sz="9600" dirty="0" smtClean="0"/>
+              <a:t>Руссский язык</a:t>
+            </a:r>
+            <a:endParaRPr lang="ru-RU" sz="9600" dirty="0"/>
+          </a:p>
+        </p:txBody>
+      </p:sp>
+      <p:sp>
+        <p:nvSpPr>
+          <p:cNvPr id="4" name="TextBox 3"/>
+          <p:cNvSpPr txBox="1"/>
+          <p:nvPr/>
+        </p:nvSpPr>
+        <p:spPr>
+          <a:xfrm>
+            <a:off x="1427312" y="1815207"/>
+            <a:ext cx="4608512" cy="923330"/>
+          </a:xfrm>
+          <a:prstGeom prst="rect">
+            <a:avLst/>
+          </a:prstGeom>
+          <a:noFill/>
+        </p:spPr>
+        <p:txBody>
+          <a:bodyPr wrap="square" rtlCol="0">
+            <a:spAutoFit/>
+          </a:bodyPr>
+          <a:lstStyle/>
+          <a:p>
+            <a:r>
+              <a:rPr lang="ru-RU" sz="5400" dirty="0" smtClean="0"/>
+              <a:t>Видео</a:t>
+            </a:r>
+            <a:endParaRPr lang="ru-RU" sz="5400" dirty="0"/>
+          </a:p>
+        </p:txBody>
+      </p:sp>
+      <p:sp>
+        <p:nvSpPr>
+          <p:cNvPr id="5" name="TextBox 4"/>
+          <p:cNvSpPr txBox="1"/>
+          <p:nvPr/>
+        </p:nvSpPr>
+        <p:spPr>
+          <a:xfrm>
+            <a:off x="827584" y="3068960"/>
+            <a:ext cx="1944216" cy="2585323"/>
+          </a:xfrm>
+          <a:prstGeom prst="rect">
+            <a:avLst/>
+          </a:prstGeom>
+          <a:noFill/>
+        </p:spPr>
+        <p:txBody>
+          <a:bodyPr wrap="square" rtlCol="0">
+            <a:spAutoFit/>
+          </a:bodyPr>
+          <a:lstStyle/>
+          <a:p>
+            <a:r>
+              <a:rPr lang="ru-RU" dirty="0" smtClean="0"/>
+              <a:t>Фото</a:t>
+            </a:r>
+          </a:p>
+          <a:p>
+            <a:endParaRPr lang="ru-RU" dirty="0" smtClean="0"/>
+          </a:p>
+          <a:p>
+            <a:endParaRPr lang="ru-RU" dirty="0"/>
+          </a:p>
+          <a:p>
+            <a:endParaRPr lang="ru-RU" dirty="0" smtClean="0"/>
+          </a:p>
+          <a:p>
+            <a:endParaRPr lang="ru-RU" dirty="0"/>
+          </a:p>
+          <a:p>
+            <a:endParaRPr lang="ru-RU" dirty="0" smtClean="0"/>
+          </a:p>
+          <a:p>
+            <a:endParaRPr lang="ru-RU" dirty="0"/>
+          </a:p>
+          <a:p>
+            <a:r>
+              <a:rPr lang="ru-RU" dirty="0" err="1"/>
+              <a:t>Шестак</a:t>
+            </a:r>
+            <a:r>
+              <a:rPr lang="ru-RU" dirty="0"/>
+              <a:t> Ольга Петровна</a:t>
+            </a:r>
+            <a:endParaRPr lang="ru-RU" dirty="0"/>
+          </a:p>
+        </p:txBody>
+      </p:sp>
+      <p:sp>
+        <p:nvSpPr>
+          <p:cNvPr id="6" name="TextBox 5"/>
+          <p:cNvSpPr txBox="1"/>
+          <p:nvPr/>
+        </p:nvSpPr>
+        <p:spPr>
+          <a:xfrm>
+            <a:off x="3491880" y="3140968"/>
+            <a:ext cx="2016224" cy="2585323"/>
+          </a:xfrm>
+          <a:prstGeom prst="rect">
+            <a:avLst/>
+          </a:prstGeom>
+          <a:noFill/>
+        </p:spPr>
+        <p:txBody>
+          <a:bodyPr wrap="square" rtlCol="0">
+            <a:spAutoFit/>
+          </a:bodyPr>
+          <a:lstStyle/>
+          <a:p>
+            <a:r>
+              <a:rPr lang="ru-RU" dirty="0" smtClean="0"/>
+              <a:t>Фото</a:t>
+            </a:r>
+          </a:p>
+          <a:p>
+            <a:endParaRPr lang="ru-RU" dirty="0"/>
+          </a:p>
+          <a:p>
+            <a:endParaRPr lang="ru-RU" dirty="0" smtClean="0"/>
+          </a:p>
+          <a:p>
+            <a:endParaRPr lang="ru-RU" dirty="0"/>
+          </a:p>
+          <a:p>
+            <a:endParaRPr lang="ru-RU" dirty="0" smtClean="0"/>
+          </a:p>
+          <a:p>
+            <a:endParaRPr lang="ru-RU" dirty="0"/>
+          </a:p>
+          <a:p>
+            <a:endParaRPr lang="ru-RU" dirty="0" smtClean="0"/>
+          </a:p>
+          <a:p>
+            <a:r>
+              <a:rPr lang="ru-RU" dirty="0"/>
+              <a:t>Левкович Елена Геннадьевна</a:t>
+            </a:r>
+            <a:endParaRPr lang="ru-RU" dirty="0" smtClean="0"/>
+          </a:p>
+        </p:txBody>
+      </p:sp>
+      <p:sp>
+        <p:nvSpPr>
+          <p:cNvPr id="7" name="TextBox 6"/>
+          <p:cNvSpPr txBox="1"/>
+          <p:nvPr/>
+        </p:nvSpPr>
+        <p:spPr>
+          <a:xfrm>
+            <a:off x="6228184" y="3140968"/>
+            <a:ext cx="2376264" cy="2585323"/>
+          </a:xfrm>
+          <a:prstGeom prst="rect">
+            <a:avLst/>
+          </a:prstGeom>
+          <a:noFill/>
+        </p:spPr>
+        <p:txBody>
+          <a:bodyPr wrap="square" rtlCol="0">
+            <a:spAutoFit/>
+          </a:bodyPr>
+          <a:lstStyle/>
+          <a:p>
+            <a:r>
+              <a:rPr lang="ru-RU" dirty="0" smtClean="0"/>
+              <a:t>Фото</a:t>
+            </a:r>
+          </a:p>
+          <a:p>
+            <a:endParaRPr lang="ru-RU" dirty="0"/>
+          </a:p>
+          <a:p>
+            <a:endParaRPr lang="ru-RU" dirty="0" smtClean="0"/>
+          </a:p>
+          <a:p>
+            <a:endParaRPr lang="ru-RU" dirty="0"/>
+          </a:p>
+          <a:p>
+            <a:endParaRPr lang="ru-RU" dirty="0" smtClean="0"/>
+          </a:p>
+          <a:p>
+            <a:endParaRPr lang="ru-RU" dirty="0"/>
+          </a:p>
+          <a:p>
+            <a:endParaRPr lang="ru-RU" dirty="0" smtClean="0"/>
+          </a:p>
+          <a:p>
+            <a:r>
+              <a:rPr lang="ru-RU" dirty="0"/>
+              <a:t>Иванович Наталья Васильевна</a:t>
+            </a:r>
+            <a:endParaRPr lang="ru-RU" dirty="0"/>
+          </a:p>
+        </p:txBody>
+      </p:sp>
+    </p:spTree>
+    <p:extLst>
+      <p:ext uri="{BB962C8B-B14F-4D97-AF65-F5344CB8AC3E}">
+        <p14:creationId xmlns:p14="http://schemas.microsoft.com/office/powerpoint/2010/main" val="2326625445"/>
+      </p:ext>
+    </p:extLst>
+  </p:cSld>
+  <p:clrMapOvr>
+    <a:masterClrMapping/>
+  </p:clrMapOvr>
+  <p:timing>
+    <p:tnLst>
+      <p:par>
+        <p:cTn id="1" dur="indefinite" restart="never" nodeType="tmRoot">
+          <p:childTnLst>
+            <p:seq concurrent="1" nextAc="seek">
+              <p:cTn id="2" dur="indefinite" nodeType="mainSeq">
+                <p:childTnLst>
+                  <p:par>
+                    <p:cTn id="3" fill="hold">
+                      <p:stCondLst>
+                        <p:cond delay="indefinite"/>
+                      </p:stCondLst>
+                      <p:childTnLst>
+                        <p:par>
+                          <p:cTn id="4" fill="hold">
+                            <p:stCondLst>
+                              <p:cond delay="0"/>
+                            </p:stCondLst>
+                            <p:childTnLst>
+                              <p:par>
+                                <p:cTn id="5" presetID="2" presetClass="entr" presetSubtype="4" fill="hold" grpId="0" nodeType="clickEffect">
+                                  <p:stCondLst>
+                                    <p:cond delay="0"/>
+                                  </p:stCondLst>
+                                  <p:childTnLst>
+                                    <p:set>
+                                      <p:cBhvr>
+                                        <p:cTn id="6" dur="1" fill="hold">
+                                          <p:stCondLst>
+                                            <p:cond delay="0"/>
+                                          </p:stCondLst>
+                                        </p:cTn>
+                                        <p:tgtEl>
+                                          <p:spTgt spid="4"/>
+                                        </p:tgtEl>
+                                        <p:attrNameLst>
+                                          <p:attrName>style.visibility</p:attrName>
+                                        </p:attrNameLst>
+                                      </p:cBhvr>
+                                      <p:to>
+                                        <p:strVal val="visible"/>
+                                      </p:to>
+                                    </p:set>
+                                    <p:anim calcmode="lin" valueType="num">
+                                      <p:cBhvr additive="base">
+                                        <p:cTn id="7" dur="500" fill="hold"/>
+                                        <p:tgtEl>
+                                          <p:spTgt spid="4"/>
+                                        </p:tgtEl>
+                                        <p:attrNameLst>
+                                          <p:attrName>ppt_x</p:attrName>
+                                        </p:attrNameLst>
+                                      </p:cBhvr>
+                                      <p:tavLst>
+                                        <p:tav tm="0">
+                                          <p:val>
+                                            <p:strVal val="#ppt_x"/>
+                                          </p:val>
+                                        </p:tav>
+                                        <p:tav tm="100000">
+                                          <p:val>
+                                            <p:strVal val="#ppt_x"/>
+                                          </p:val>
+                                        </p:tav>
+                                      </p:tavLst>
+                                    </p:anim>
+                                    <p:anim calcmode="lin" valueType="num">
+                                      <p:cBhvr additive="base">
+                                        <p:cTn id="8" dur="500" fill="hold"/>
+                                        <p:tgtEl>
+                                          <p:spTgt spid="4"/>
+                                        </p:tgtEl>
+                                        <p:attrNameLst>
+                                          <p:attrName>ppt_y</p:attrName>
+                                        </p:attrNameLst>
+                                      </p:cBhvr>
+                                      <p:tavLst>
+                                        <p:tav tm="0">
+                                          <p:val>
+                                            <p:strVal val="1+#ppt_h/2"/>
+                                          </p:val>
+                                        </p:tav>
+                                        <p:tav tm="100000">
+                                          <p:val>
+                                            <p:strVal val="#ppt_y"/>
+                                          </p:val>
+                                        </p:tav>
+                                      </p:tavLst>
+                                    </p:anim>
+                                  </p:childTnLst>
+                                </p:cTn>
+                              </p:par>
+                            </p:childTnLst>
+                          </p:cTn>
+                        </p:par>
+                      </p:childTnLst>
+                    </p:cTn>
+                  </p:par>
+                  <p:par>
+                    <p:cTn id="9" fill="hold">
+                      <p:stCondLst>
+                        <p:cond delay="indefinite"/>
+                      </p:stCondLst>
+                      <p:childTnLst>
+                        <p:par>
+                          <p:cTn id="10" fill="hold">
+                            <p:stCondLst>
+                              <p:cond delay="0"/>
+                            </p:stCondLst>
+                            <p:childTnLst>
+                              <p:par>
+                                <p:cTn id="11" presetID="26" presetClass="entr" presetSubtype="0" fill="hold" grpId="0" nodeType="clickEffect">
+                                  <p:stCondLst>
+                                    <p:cond delay="0"/>
+                                  </p:stCondLst>
+                                  <p:childTnLst>
+                                    <p:set>
+                                      <p:cBhvr>
+                                        <p:cTn id="12" dur="1" fill="hold">
+                                          <p:stCondLst>
+                                            <p:cond delay="0"/>
+                                          </p:stCondLst>
+                                        </p:cTn>
+                                        <p:tgtEl>
+                                          <p:spTgt spid="5"/>
+                                        </p:tgtEl>
+                                        <p:attrNameLst>
+                                          <p:attrName>style.visibility</p:attrName>
+                                        </p:attrNameLst>
+                                      </p:cBhvr>
+                                      <p:to>
+                                        <p:strVal val="visible"/>
+                                      </p:to>
+                                    </p:set>
+                                    <p:animEffect transition="in" filter="wipe(down)">
+                                      <p:cBhvr>
+                                        <p:cTn id="13" dur="580">
+                                          <p:stCondLst>
+                                            <p:cond delay="0"/>
+                                          </p:stCondLst>
+                                        </p:cTn>
+                                        <p:tgtEl>
+                                          <p:spTgt spid="5"/>
+                                        </p:tgtEl>
+                                      </p:cBhvr>
+                                    </p:animEffect>
+                                    <p:anim calcmode="lin" valueType="num">
+                                      <p:cBhvr>
+                                        <p:cTn id="14" dur="1822" tmFilter="0,0; 0.14,0.36; 0.43,0.73; 0.71,0.91; 1.0,1.0">
+                                          <p:stCondLst>
+                                            <p:cond delay="0"/>
+                                          </p:stCondLst>
+                                        </p:cTn>
+                                        <p:tgtEl>
+                                          <p:spTgt spid="5"/>
+                                        </p:tgtEl>
+                                        <p:attrNameLst>
+                                          <p:attrName>ppt_x</p:attrName>
+                                        </p:attrNameLst>
+                                      </p:cBhvr>
+                                      <p:tavLst>
+                                        <p:tav tm="0">
+                                          <p:val>
+                                            <p:strVal val="#ppt_x-0.25"/>
+                                          </p:val>
+                                        </p:tav>
+                                        <p:tav tm="100000">
+                                          <p:val>
+                                            <p:strVal val="#ppt_x"/>
+                                          </p:val>
+                                        </p:tav>
+                                      </p:tavLst>
+                                    </p:anim>
+                                    <p:anim calcmode="lin" valueType="num">
+                                      <p:cBhvr>
+                                        <p:cTn id="15" dur="664" tmFilter="0.0,0.0; 0.25,0.07; 0.50,0.2; 0.75,0.467; 1.0,1.0">
+                                          <p:stCondLst>
+                                            <p:cond delay="0"/>
+                                          </p:stCondLst>
+                                        </p:cTn>
+                                        <p:tgtEl>
+                                          <p:spTgt spid="5"/>
+                                        </p:tgtEl>
+                                        <p:attrNameLst>
+                                          <p:attrName>ppt_y</p:attrName>
+                                        </p:attrNameLst>
+                                      </p:cBhvr>
+                                      <p:tavLst>
+                                        <p:tav tm="0" fmla="#ppt_y-sin(pi*$)/3">
+                                          <p:val>
+                                            <p:fltVal val="0.5"/>
+                                          </p:val>
+                                        </p:tav>
+                                        <p:tav tm="100000">
+                                          <p:val>
+                                            <p:fltVal val="1"/>
+                                          </p:val>
+                                        </p:tav>
+                                      </p:tavLst>
+                                    </p:anim>
+                                    <p:anim calcmode="lin" valueType="num">
+                                      <p:cBhvr>
+                                        <p:cTn id="16" dur="664" tmFilter="0, 0; 0.125,0.2665; 0.25,0.4; 0.375,0.465; 0.5,0.5;  0.625,0.535; 0.75,0.6; 0.875,0.7335; 1,1">
+                                          <p:stCondLst>
+                                            <p:cond delay="664"/>
+                                          </p:stCondLst>
+                                        </p:cTn>
+                                        <p:tgtEl>
+                                          <p:spTgt spid="5"/>
+                                        </p:tgtEl>
+                                        <p:attrNameLst>
+                                          <p:attrName>ppt_y</p:attrName>
+                                        </p:attrNameLst>
+                                      </p:cBhvr>
+                                      <p:tavLst>
+                                        <p:tav tm="0" fmla="#ppt_y-sin(pi*$)/9">
+                                          <p:val>
+                                            <p:fltVal val="0"/>
+                                          </p:val>
+                                        </p:tav>
+                                        <p:tav tm="100000">
+                                          <p:val>
+                                            <p:fltVal val="1"/>
+                                          </p:val>
+                                        </p:tav>
+                                      </p:tavLst>
+                                    </p:anim>
+                                    <p:anim calcmode="lin" valueType="num">
+                                      <p:cBhvr>
+                                        <p:cTn id="17" dur="332" tmFilter="0, 0; 0.125,0.2665; 0.25,0.4; 0.375,0.465; 0.5,0.5;  0.625,0.535; 0.75,0.6; 0.875,0.7335; 1,1">
+                                          <p:stCondLst>
+                                            <p:cond delay="1324"/>
+                                          </p:stCondLst>
+                                        </p:cTn>
+                                        <p:tgtEl>
+                                          <p:spTgt spid="5"/>
+                                        </p:tgtEl>
+                                        <p:attrNameLst>
+                                          <p:attrName>ppt_y</p:attrName>
+                                        </p:attrNameLst>
+                                      </p:cBhvr>
+                                      <p:tavLst>
+                                        <p:tav tm="0" fmla="#ppt_y-sin(pi*$)/27">
+                                          <p:val>
+                                            <p:fltVal val="0"/>
+                                          </p:val>
+                                        </p:tav>
+                                        <p:tav tm="100000">
+                                          <p:val>
+                                            <p:fltVal val="1"/>
+                                          </p:val>
+                                        </p:tav>
+                                      </p:tavLst>
+                                    </p:anim>
+                                    <p:anim calcmode="lin" valueType="num">
+                                      <p:cBhvr>
+                                        <p:cTn id="18" dur="164" tmFilter="0, 0; 0.125,0.2665; 0.25,0.4; 0.375,0.465; 0.5,0.5;  0.625,0.535; 0.75,0.6; 0.875,0.7335; 1,1">
+                                          <p:stCondLst>
+                                            <p:cond delay="1656"/>
+                                          </p:stCondLst>
+                                        </p:cTn>
+                                        <p:tgtEl>
+                                          <p:spTgt spid="5"/>
+                                        </p:tgtEl>
+                                        <p:attrNameLst>
+                                          <p:attrName>ppt_y</p:attrName>
+                                        </p:attrNameLst>
+                                      </p:cBhvr>
+                                      <p:tavLst>
+                                        <p:tav tm="0" fmla="#ppt_y-sin(pi*$)/81">
+                                          <p:val>
+                                            <p:fltVal val="0"/>
+                                          </p:val>
+                                        </p:tav>
+                                        <p:tav tm="100000">
+                                          <p:val>
+                                            <p:fltVal val="1"/>
+                                          </p:val>
+                                        </p:tav>
+                                      </p:tavLst>
+                                    </p:anim>
+                                    <p:animScale>
+                                      <p:cBhvr>
+                                        <p:cTn id="19" dur="26">
+                                          <p:stCondLst>
+                                            <p:cond delay="650"/>
+                                          </p:stCondLst>
+                                        </p:cTn>
+                                        <p:tgtEl>
+                                          <p:spTgt spid="5"/>
+                                        </p:tgtEl>
+                                      </p:cBhvr>
+                                      <p:to x="100000" y="60000"/>
+                                    </p:animScale>
+                                    <p:animScale>
+                                      <p:cBhvr>
+                                        <p:cTn id="20" dur="166" decel="50000">
+                                          <p:stCondLst>
+                                            <p:cond delay="676"/>
+                                          </p:stCondLst>
+                                        </p:cTn>
+                                        <p:tgtEl>
+                                          <p:spTgt spid="5"/>
+                                        </p:tgtEl>
+                                      </p:cBhvr>
+                                      <p:to x="100000" y="100000"/>
+                                    </p:animScale>
+                                    <p:animScale>
+                                      <p:cBhvr>
+                                        <p:cTn id="21" dur="26">
+                                          <p:stCondLst>
+                                            <p:cond delay="1312"/>
+                                          </p:stCondLst>
+                                        </p:cTn>
+                                        <p:tgtEl>
+                                          <p:spTgt spid="5"/>
+                                        </p:tgtEl>
+                                      </p:cBhvr>
+                                      <p:to x="100000" y="80000"/>
+                                    </p:animScale>
+                                    <p:animScale>
+                                      <p:cBhvr>
+                                        <p:cTn id="22" dur="166" decel="50000">
+                                          <p:stCondLst>
+                                            <p:cond delay="1338"/>
+                                          </p:stCondLst>
+                                        </p:cTn>
+                                        <p:tgtEl>
+                                          <p:spTgt spid="5"/>
+                                        </p:tgtEl>
+                                      </p:cBhvr>
+                                      <p:to x="100000" y="100000"/>
+                                    </p:animScale>
+                                    <p:animScale>
+                                      <p:cBhvr>
+                                        <p:cTn id="23" dur="26">
+                                          <p:stCondLst>
+                                            <p:cond delay="1642"/>
+                                          </p:stCondLst>
+                                        </p:cTn>
+                                        <p:tgtEl>
+                                          <p:spTgt spid="5"/>
+                                        </p:tgtEl>
+                                      </p:cBhvr>
+                                      <p:to x="100000" y="90000"/>
+                                    </p:animScale>
+                                    <p:animScale>
+                                      <p:cBhvr>
+                                        <p:cTn id="24" dur="166" decel="50000">
+                                          <p:stCondLst>
+                                            <p:cond delay="1668"/>
+                                          </p:stCondLst>
+                                        </p:cTn>
+                                        <p:tgtEl>
+                                          <p:spTgt spid="5"/>
+                                        </p:tgtEl>
+                                      </p:cBhvr>
+                                      <p:to x="100000" y="100000"/>
+                                    </p:animScale>
+                                    <p:animScale>
+                                      <p:cBhvr>
+                                        <p:cTn id="25" dur="26">
+                                          <p:stCondLst>
+                                            <p:cond delay="1808"/>
+                                          </p:stCondLst>
+                                        </p:cTn>
+                                        <p:tgtEl>
+                                          <p:spTgt spid="5"/>
+                                        </p:tgtEl>
+                                      </p:cBhvr>
+                                      <p:to x="100000" y="95000"/>
+                                    </p:animScale>
+                                    <p:animScale>
+                                      <p:cBhvr>
+                                        <p:cTn id="26" dur="166" decel="50000">
+                                          <p:stCondLst>
+                                            <p:cond delay="1834"/>
+                                          </p:stCondLst>
+                                        </p:cTn>
+                                        <p:tgtEl>
+                                          <p:spTgt spid="5"/>
+                                        </p:tgtEl>
+                                      </p:cBhvr>
+                                      <p:to x="100000" y="100000"/>
+                                    </p:animScale>
+                                  </p:childTnLst>
+                                </p:cTn>
+                              </p:par>
+                              <p:par>
+                                <p:cTn id="27" presetID="26" presetClass="entr" presetSubtype="0" fill="hold" grpId="0" nodeType="withEffect">
+                                  <p:stCondLst>
+                                    <p:cond delay="0"/>
+                                  </p:stCondLst>
+                                  <p:childTnLst>
+                                    <p:set>
+                                      <p:cBhvr>
+                                        <p:cTn id="28" dur="1" fill="hold">
+                                          <p:stCondLst>
+                                            <p:cond delay="0"/>
+                                          </p:stCondLst>
+                                        </p:cTn>
+                                        <p:tgtEl>
+                                          <p:spTgt spid="6"/>
+                                        </p:tgtEl>
+                                        <p:attrNameLst>
+                                          <p:attrName>style.visibility</p:attrName>
+                                        </p:attrNameLst>
+                                      </p:cBhvr>
+                                      <p:to>
+                                        <p:strVal val="visible"/>
+                                      </p:to>
+                                    </p:set>
+                                    <p:animEffect transition="in" filter="wipe(down)">
+                                      <p:cBhvr>
+                                        <p:cTn id="29" dur="580">
+                                          <p:stCondLst>
+                                            <p:cond delay="0"/>
+                                          </p:stCondLst>
+                                        </p:cTn>
+                                        <p:tgtEl>
+                                          <p:spTgt spid="6"/>
+                                        </p:tgtEl>
+                                      </p:cBhvr>
+                                    </p:animEffect>
+                                    <p:anim calcmode="lin" valueType="num">
+                                      <p:cBhvr>
+                                        <p:cTn id="30" dur="1822" tmFilter="0,0; 0.14,0.36; 0.43,0.73; 0.71,0.91; 1.0,1.0">
+                                          <p:stCondLst>
+                                            <p:cond delay="0"/>
+                                          </p:stCondLst>
+                                        </p:cTn>
+                                        <p:tgtEl>
+                                          <p:spTgt spid="6"/>
+                                        </p:tgtEl>
+                                        <p:attrNameLst>
+                                          <p:attrName>ppt_x</p:attrName>
+                                        </p:attrNameLst>
+                                      </p:cBhvr>
+                                      <p:tavLst>
+                                        <p:tav tm="0">
+                                          <p:val>
+                                            <p:strVal val="#ppt_x-0.25"/>
+                                          </p:val>
+                                        </p:tav>
+                                        <p:tav tm="100000">
+                                          <p:val>
+                                            <p:strVal val="#ppt_x"/>
+                                          </p:val>
+                                        </p:tav>
+                                      </p:tavLst>
+                                    </p:anim>
+                                    <p:anim calcmode="lin" valueType="num">
+                                      <p:cBhvr>
+                                        <p:cTn id="31" dur="664" tmFilter="0.0,0.0; 0.25,0.07; 0.50,0.2; 0.75,0.467; 1.0,1.0">
+                                          <p:stCondLst>
+                                            <p:cond delay="0"/>
+                                          </p:stCondLst>
+                                        </p:cTn>
+                                        <p:tgtEl>
+                                          <p:spTgt spid="6"/>
+                                        </p:tgtEl>
+                                        <p:attrNameLst>
+                                          <p:attrName>ppt_y</p:attrName>
+                                        </p:attrNameLst>
+                                      </p:cBhvr>
+                                      <p:tavLst>
+                                        <p:tav tm="0" fmla="#ppt_y-sin(pi*$)/3">
+                                          <p:val>
+                                            <p:fltVal val="0.5"/>
+                                          </p:val>
+                                        </p:tav>
+                                        <p:tav tm="100000">
+                                          <p:val>
+                                            <p:fltVal val="1"/>
+                                          </p:val>
+                                        </p:tav>
+                                      </p:tavLst>
+                                    </p:anim>
+                                    <p:anim calcmode="lin" valueType="num">
+                                      <p:cBhvr>
+                                        <p:cTn id="32" dur="664" tmFilter="0, 0; 0.125,0.2665; 0.25,0.4; 0.375,0.465; 0.5,0.5;  0.625,0.535; 0.75,0.6; 0.875,0.7335; 1,1">
+                                          <p:stCondLst>
+                                            <p:cond delay="664"/>
+                                          </p:stCondLst>
+                                        </p:cTn>
+                                        <p:tgtEl>
+                                          <p:spTgt spid="6"/>
+                                        </p:tgtEl>
+                                        <p:attrNameLst>
+                                          <p:attrName>ppt_y</p:attrName>
+                                        </p:attrNameLst>
+                                      </p:cBhvr>
+                                      <p:tavLst>
+                                        <p:tav tm="0" fmla="#ppt_y-sin(pi*$)/9">
+                                          <p:val>
+                                            <p:fltVal val="0"/>
+                                          </p:val>
+                                        </p:tav>
+                                        <p:tav tm="100000">
+                                          <p:val>
+                                            <p:fltVal val="1"/>
+                                          </p:val>
+                                        </p:tav>
+                                      </p:tavLst>
+                                    </p:anim>
+                                    <p:anim calcmode="lin" valueType="num">
+                                      <p:cBhvr>
+                                        <p:cTn id="33" dur="332" tmFilter="0, 0; 0.125,0.2665; 0.25,0.4; 0.375,0.465; 0.5,0.5;  0.625,0.535; 0.75,0.6; 0.875,0.7335; 1,1">
+                                          <p:stCondLst>
+                                            <p:cond delay="1324"/>
+                                          </p:stCondLst>
+                                        </p:cTn>
+                                        <p:tgtEl>
+                                          <p:spTgt spid="6"/>
+                                        </p:tgtEl>
+                                        <p:attrNameLst>
+                                          <p:attrName>ppt_y</p:attrName>
+                                        </p:attrNameLst>
+                                      </p:cBhvr>
+                                      <p:tavLst>
+                                        <p:tav tm="0" fmla="#ppt_y-sin(pi*$)/27">
+                                          <p:val>
+                                            <p:fltVal val="0"/>
+                                          </p:val>
+                                        </p:tav>
+                                        <p:tav tm="100000">
+                                          <p:val>
+                                            <p:fltVal val="1"/>
+                                          </p:val>
+                                        </p:tav>
+                                      </p:tavLst>
+                                    </p:anim>
+                                    <p:anim calcmode="lin" valueType="num">
+                                      <p:cBhvr>
+                                        <p:cTn id="34" dur="164" tmFilter="0, 0; 0.125,0.2665; 0.25,0.4; 0.375,0.465; 0.5,0.5;  0.625,0.535; 0.75,0.6; 0.875,0.7335; 1,1">
+                                          <p:stCondLst>
+                                            <p:cond delay="1656"/>
+                                          </p:stCondLst>
+                                        </p:cTn>
+                                        <p:tgtEl>
+                                          <p:spTgt spid="6"/>
+                                        </p:tgtEl>
+                                        <p:attrNameLst>
+                                          <p:attrName>ppt_y</p:attrName>
+                                        </p:attrNameLst>
+                                      </p:cBhvr>
+                                      <p:tavLst>
+                                        <p:tav tm="0" fmla="#ppt_y-sin(pi*$)/81">
+                                          <p:val>
+                                            <p:fltVal val="0"/>
+                                          </p:val>
+                                        </p:tav>
+                                        <p:tav tm="100000">
+                                          <p:val>
+                                            <p:fltVal val="1"/>
+                                          </p:val>
+                                        </p:tav>
+                                      </p:tavLst>
+                                    </p:anim>
+                                    <p:animScale>
+                                      <p:cBhvr>
+                                        <p:cTn id="35" dur="26">
+                                          <p:stCondLst>
+                                            <p:cond delay="650"/>
+                                          </p:stCondLst>
+                                        </p:cTn>
+                                        <p:tgtEl>
+                                          <p:spTgt spid="6"/>
+                                        </p:tgtEl>
+                                      </p:cBhvr>
+                                      <p:to x="100000" y="60000"/>
+                                    </p:animScale>
+                                    <p:animScale>
+                                      <p:cBhvr>
+                                        <p:cTn id="36" dur="166" decel="50000">
+                                          <p:stCondLst>
+                                            <p:cond delay="676"/>
+                                          </p:stCondLst>
+                                        </p:cTn>
+                                        <p:tgtEl>
+                                          <p:spTgt spid="6"/>
+                                        </p:tgtEl>
+                                      </p:cBhvr>
+                                      <p:to x="100000" y="100000"/>
+                                    </p:animScale>
+                                    <p:animScale>
+                                      <p:cBhvr>
+                                        <p:cTn id="37" dur="26">
+                                          <p:stCondLst>
+                                            <p:cond delay="1312"/>
+                                          </p:stCondLst>
+                                        </p:cTn>
+                                        <p:tgtEl>
+                                          <p:spTgt spid="6"/>
+                                        </p:tgtEl>
+                                      </p:cBhvr>
+                                      <p:to x="100000" y="80000"/>
+                                    </p:animScale>
+                                    <p:animScale>
+                                      <p:cBhvr>
+                                        <p:cTn id="38" dur="166" decel="50000">
+                                          <p:stCondLst>
+                                            <p:cond delay="1338"/>
+                                          </p:stCondLst>
+                                        </p:cTn>
+                                        <p:tgtEl>
+                                          <p:spTgt spid="6"/>
+                                        </p:tgtEl>
+                                      </p:cBhvr>
+                                      <p:to x="100000" y="100000"/>
+                                    </p:animScale>
+                                    <p:animScale>
+                                      <p:cBhvr>
+                                        <p:cTn id="39" dur="26">
+                                          <p:stCondLst>
+                                            <p:cond delay="1642"/>
+                                          </p:stCondLst>
+                                        </p:cTn>
+                                        <p:tgtEl>
+                                          <p:spTgt spid="6"/>
+                                        </p:tgtEl>
+                                      </p:cBhvr>
+                                      <p:to x="100000" y="90000"/>
+                                    </p:animScale>
+                                    <p:animScale>
+                                      <p:cBhvr>
+                                        <p:cTn id="40" dur="166" decel="50000">
+                                          <p:stCondLst>
+                                            <p:cond delay="1668"/>
+                                          </p:stCondLst>
+                                        </p:cTn>
+                                        <p:tgtEl>
+                                          <p:spTgt spid="6"/>
+                                        </p:tgtEl>
+                                      </p:cBhvr>
+                                      <p:to x="100000" y="100000"/>
+                                    </p:animScale>
+                                    <p:animScale>
+                                      <p:cBhvr>
+                                        <p:cTn id="41" dur="26">
+                                          <p:stCondLst>
+                                            <p:cond delay="1808"/>
+                                          </p:stCondLst>
+                                        </p:cTn>
+                                        <p:tgtEl>
+                                          <p:spTgt spid="6"/>
+                                        </p:tgtEl>
+                                      </p:cBhvr>
+                                      <p:to x="100000" y="95000"/>
+                                    </p:animScale>
+                                    <p:animScale>
+                                      <p:cBhvr>
+                                        <p:cTn id="42" dur="166" decel="50000">
+                                          <p:stCondLst>
+                                            <p:cond delay="1834"/>
+                                          </p:stCondLst>
+                                        </p:cTn>
+                                        <p:tgtEl>
+                                          <p:spTgt spid="6"/>
+                                        </p:tgtEl>
+                                      </p:cBhvr>
+                                      <p:to x="100000" y="100000"/>
+                                    </p:animScale>
+                                  </p:childTnLst>
+                                </p:cTn>
+                              </p:par>
+                              <p:par>
+                                <p:cTn id="43" presetID="26" presetClass="entr" presetSubtype="0" fill="hold" grpId="0" nodeType="withEffect">
+                                  <p:stCondLst>
+                                    <p:cond delay="0"/>
+                                  </p:stCondLst>
+                                  <p:childTnLst>
+                                    <p:set>
+                                      <p:cBhvr>
+                                        <p:cTn id="44" dur="1" fill="hold">
+                                          <p:stCondLst>
+                                            <p:cond delay="0"/>
+                                          </p:stCondLst>
+                                        </p:cTn>
+                                        <p:tgtEl>
+                                          <p:spTgt spid="7"/>
+                                        </p:tgtEl>
+                                        <p:attrNameLst>
+                                          <p:attrName>style.visibility</p:attrName>
+                                        </p:attrNameLst>
+                                      </p:cBhvr>
+                                      <p:to>
+                                        <p:strVal val="visible"/>
+                                      </p:to>
+                                    </p:set>
+                                    <p:animEffect transition="in" filter="wipe(down)">
+                                      <p:cBhvr>
+                                        <p:cTn id="45" dur="580">
+                                          <p:stCondLst>
+                                            <p:cond delay="0"/>
+                                          </p:stCondLst>
+                                        </p:cTn>
+                                        <p:tgtEl>
+                                          <p:spTgt spid="7"/>
+                                        </p:tgtEl>
+                                      </p:cBhvr>
+                                    </p:animEffect>
+                                    <p:anim calcmode="lin" valueType="num">
+                                      <p:cBhvr>
+                                        <p:cTn id="46" dur="1822" tmFilter="0,0; 0.14,0.36; 0.43,0.73; 0.71,0.91; 1.0,1.0">
+                                          <p:stCondLst>
+                                            <p:cond delay="0"/>
+                                          </p:stCondLst>
+                                        </p:cTn>
+                                        <p:tgtEl>
+                                          <p:spTgt spid="7"/>
+                                        </p:tgtEl>
+                                        <p:attrNameLst>
+                                          <p:attrName>ppt_x</p:attrName>
+                                        </p:attrNameLst>
+                                      </p:cBhvr>
+                                      <p:tavLst>
+                                        <p:tav tm="0">
+                                          <p:val>
+                                            <p:strVal val="#ppt_x-0.25"/>
+                                          </p:val>
+                                        </p:tav>
+                                        <p:tav tm="100000">
+                                          <p:val>
+                                            <p:strVal val="#ppt_x"/>
+                                          </p:val>
+                                        </p:tav>
+                                      </p:tavLst>
+                                    </p:anim>
+                                    <p:anim calcmode="lin" valueType="num">
+                                      <p:cBhvr>
+                                        <p:cTn id="47" dur="664" tmFilter="0.0,0.0; 0.25,0.07; 0.50,0.2; 0.75,0.467; 1.0,1.0">
+                                          <p:stCondLst>
+                                            <p:cond delay="0"/>
+                                          </p:stCondLst>
+                                        </p:cTn>
+                                        <p:tgtEl>
+                                          <p:spTgt spid="7"/>
+                                        </p:tgtEl>
+                                        <p:attrNameLst>
+                                          <p:attrName>ppt_y</p:attrName>
+                                        </p:attrNameLst>
+                                      </p:cBhvr>
+                                      <p:tavLst>
+                                        <p:tav tm="0" fmla="#ppt_y-sin(pi*$)/3">
+                                          <p:val>
+                                            <p:fltVal val="0.5"/>
+                                          </p:val>
+                                        </p:tav>
+                                        <p:tav tm="100000">
+                                          <p:val>
+                                            <p:fltVal val="1"/>
+                                          </p:val>
+                                        </p:tav>
+                                      </p:tavLst>
+                                    </p:anim>
+                                    <p:anim calcmode="lin" valueType="num">
+                                      <p:cBhvr>
+                                        <p:cTn id="48" dur="664" tmFilter="0, 0; 0.125,0.2665; 0.25,0.4; 0.375,0.465; 0.5,0.5;  0.625,0.535; 0.75,0.6; 0.875,0.7335; 1,1">
+                                          <p:stCondLst>
+                                            <p:cond delay="664"/>
+                                          </p:stCondLst>
+                                        </p:cTn>
+                                        <p:tgtEl>
+                                          <p:spTgt spid="7"/>
+                                        </p:tgtEl>
+                                        <p:attrNameLst>
+                                          <p:attrName>ppt_y</p:attrName>
+                                        </p:attrNameLst>
+                                      </p:cBhvr>
+                                      <p:tavLst>
+                                        <p:tav tm="0" fmla="#ppt_y-sin(pi*$)/9">
+                                          <p:val>
+                                            <p:fltVal val="0"/>
+                                          </p:val>
+                                        </p:tav>
+                                        <p:tav tm="100000">
+                                          <p:val>
+                                            <p:fltVal val="1"/>
+                                          </p:val>
+                                        </p:tav>
+                                      </p:tavLst>
+                                    </p:anim>
+                                    <p:anim calcmode="lin" valueType="num">
+                                      <p:cBhvr>
+                                        <p:cTn id="49" dur="332" tmFilter="0, 0; 0.125,0.2665; 0.25,0.4; 0.375,0.465; 0.5,0.5;  0.625,0.535; 0.75,0.6; 0.875,0.7335; 1,1">
+                                          <p:stCondLst>
+                                            <p:cond delay="1324"/>
+                                          </p:stCondLst>
+                                        </p:cTn>
+                                        <p:tgtEl>
+                                          <p:spTgt spid="7"/>
+                                        </p:tgtEl>
+                                        <p:attrNameLst>
+                                          <p:attrName>ppt_y</p:attrName>
+                                        </p:attrNameLst>
+                                      </p:cBhvr>
+                                      <p:tavLst>
+                                        <p:tav tm="0" fmla="#ppt_y-sin(pi*$)/27">
+                                          <p:val>
+                                            <p:fltVal val="0"/>
+                                          </p:val>
+                                        </p:tav>
+                                        <p:tav tm="100000">
+                                          <p:val>
+                                            <p:fltVal val="1"/>
+                                          </p:val>
+                                        </p:tav>
+                                      </p:tavLst>
+                                    </p:anim>
+                                    <p:anim calcmode="lin" valueType="num">
+                                      <p:cBhvr>
+                                        <p:cTn id="50" dur="164" tmFilter="0, 0; 0.125,0.2665; 0.25,0.4; 0.375,0.465; 0.5,0.5;  0.625,0.535; 0.75,0.6; 0.875,0.7335; 1,1">
+                                          <p:stCondLst>
+                                            <p:cond delay="1656"/>
+                                          </p:stCondLst>
+                                        </p:cTn>
+                                        <p:tgtEl>
+                                          <p:spTgt spid="7"/>
+                                        </p:tgtEl>
+                                        <p:attrNameLst>
+                                          <p:attrName>ppt_y</p:attrName>
+                                        </p:attrNameLst>
+                                      </p:cBhvr>
+                                      <p:tavLst>
+                                        <p:tav tm="0" fmla="#ppt_y-sin(pi*$)/81">
+                                          <p:val>
+                                            <p:fltVal val="0"/>
+                                          </p:val>
+                                        </p:tav>
+                                        <p:tav tm="100000">
+                                          <p:val>
+                                            <p:fltVal val="1"/>
+                                          </p:val>
+                                        </p:tav>
+                                      </p:tavLst>
+                                    </p:anim>
+                                    <p:animScale>
+                                      <p:cBhvr>
+                                        <p:cTn id="51" dur="26">
+                                          <p:stCondLst>
+                                            <p:cond delay="650"/>
+                                          </p:stCondLst>
+                                        </p:cTn>
+                                        <p:tgtEl>
+                                          <p:spTgt spid="7"/>
+                                        </p:tgtEl>
+                                      </p:cBhvr>
+                                      <p:to x="100000" y="60000"/>
+                                    </p:animScale>
+                                    <p:animScale>
+                                      <p:cBhvr>
+                                        <p:cTn id="52" dur="166" decel="50000">
+                                          <p:stCondLst>
+                                            <p:cond delay="676"/>
+                                          </p:stCondLst>
+                                        </p:cTn>
+                                        <p:tgtEl>
+                                          <p:spTgt spid="7"/>
+                                        </p:tgtEl>
+                                      </p:cBhvr>
+                                      <p:to x="100000" y="100000"/>
+                                    </p:animScale>
+                                    <p:animScale>
+                                      <p:cBhvr>
+                                        <p:cTn id="53" dur="26">
+                                          <p:stCondLst>
+                                            <p:cond delay="1312"/>
+                                          </p:stCondLst>
+                                        </p:cTn>
+                                        <p:tgtEl>
+                                          <p:spTgt spid="7"/>
+                                        </p:tgtEl>
+                                      </p:cBhvr>
+                                      <p:to x="100000" y="80000"/>
+                                    </p:animScale>
+                                    <p:animScale>
+                                      <p:cBhvr>
+                                        <p:cTn id="54" dur="166" decel="50000">
+                                          <p:stCondLst>
+                                            <p:cond delay="1338"/>
+                                          </p:stCondLst>
+                                        </p:cTn>
+                                        <p:tgtEl>
+                                          <p:spTgt spid="7"/>
+                                        </p:tgtEl>
+                                      </p:cBhvr>
+                                      <p:to x="100000" y="100000"/>
+                                    </p:animScale>
+                                    <p:animScale>
+                                      <p:cBhvr>
+                                        <p:cTn id="55" dur="26">
+                                          <p:stCondLst>
+                                            <p:cond delay="1642"/>
+                                          </p:stCondLst>
+                                        </p:cTn>
+                                        <p:tgtEl>
+                                          <p:spTgt spid="7"/>
+                                        </p:tgtEl>
+                                      </p:cBhvr>
+                                      <p:to x="100000" y="90000"/>
+                                    </p:animScale>
+                                    <p:animScale>
+                                      <p:cBhvr>
+                                        <p:cTn id="56" dur="166" decel="50000">
+                                          <p:stCondLst>
+                                            <p:cond delay="1668"/>
+                                          </p:stCondLst>
+                                        </p:cTn>
+                                        <p:tgtEl>
+                                          <p:spTgt spid="7"/>
+                                        </p:tgtEl>
+                                      </p:cBhvr>
+                                      <p:to x="100000" y="100000"/>
+                                    </p:animScale>
+                                    <p:animScale>
+                                      <p:cBhvr>
+                                        <p:cTn id="57" dur="26">
+                                          <p:stCondLst>
+                                            <p:cond delay="1808"/>
+                                          </p:stCondLst>
+                                        </p:cTn>
+                                        <p:tgtEl>
+                                          <p:spTgt spid="7"/>
+                                        </p:tgtEl>
+                                      </p:cBhvr>
+                                      <p:to x="100000" y="95000"/>
+                                    </p:animScale>
+                                    <p:animScale>
+                                      <p:cBhvr>
+                                        <p:cTn id="58" dur="166" decel="50000">
+                                          <p:stCondLst>
+                                            <p:cond delay="1834"/>
+                                          </p:stCondLst>
+                                        </p:cTn>
+                                        <p:tgtEl>
+                                          <p:spTgt spid="7"/>
+                                        </p:tgtEl>
+                                      </p:cBhvr>
+                                      <p:to x="100000" y="100000"/>
+                                    </p:animScale>
+                                  </p:childTnLst>
+                                </p:cTn>
+                              </p:par>
+                            </p:childTnLst>
+                          </p:cTn>
+                        </p:par>
+                      </p:childTnLst>
+                    </p:cTn>
+                  </p:par>
+                </p:childTnLst>
+              </p:cTn>
+              <p:prevCondLst>
+                <p:cond evt="onPrev" delay="0">
+                  <p:tgtEl>
+                    <p:sldTgt/>
+                  </p:tgtEl>
+                </p:cond>
+              </p:prevCondLst>
+              <p:nextCondLst>
+                <p:cond evt="onNext" delay="0">
+                  <p:tgtEl>
+                    <p:sldTgt/>
+                  </p:tgtEl>
+                </p:cond>
+              </p:nextCondLst>
+            </p:seq>
+          </p:childTnLst>
+        </p:cTn>
+      </p:par>
+    </p:tnLst>
+    <p:bldLst>
+      <p:bldP spid="4" grpId="0"/>
+      <p:bldP spid="5" grpId="0"/>
+      <p:bldP spid="6" grpId="0"/>
+      <p:bldP spid="7" grpId="0"/>
+    </p:bldLst>
+  </p:timing>
+</p:sld>
+</file>
+
+<file path=ppt/slides/slide8.xml><?xml version="1.0" encoding="utf-8"?>
+<p:sld xmlns:a="http://schemas.openxmlformats.org/drawingml/2006/main" xmlns:r="http://schemas.openxmlformats.org/officeDocument/2006/relationships" xmlns:p="http://schemas.openxmlformats.org/presentationml/2006/main">
+  <p:cSld>
+    <p:spTree>
+      <p:nvGrpSpPr>
+        <p:cNvPr id="1" name=""/>
+        <p:cNvGrpSpPr/>
+        <p:nvPr/>
+      </p:nvGrpSpPr>
+      <p:grpSpPr>
+        <a:xfrm>
+          <a:off x="0" y="0"/>
+          <a:ext cx="0" cy="0"/>
+          <a:chOff x="0" y="0"/>
+          <a:chExt cx="0" cy="0"/>
+        </a:xfrm>
+      </p:grpSpPr>
+      <p:sp>
+        <p:nvSpPr>
+          <p:cNvPr id="2" name="Заголовок 1"/>
+          <p:cNvSpPr>
+            <a:spLocks noGrp="1"/>
+          </p:cNvSpPr>
+          <p:nvPr>
+            <p:ph type="title"/>
+          </p:nvPr>
+        </p:nvSpPr>
+        <p:spPr>
+          <a:xfrm>
+            <a:off x="495978" y="125760"/>
+            <a:ext cx="8229600" cy="1143000"/>
+          </a:xfrm>
+        </p:spPr>
+        <p:txBody>
+          <a:bodyPr>
+            <a:noAutofit/>
+          </a:bodyPr>
+          <a:lstStyle/>
+          <a:p>
+            <a:r>
+              <a:rPr lang="ru-RU" sz="9600" dirty="0" smtClean="0"/>
+              <a:t>Химия</a:t>
+            </a:r>
+            <a:endParaRPr lang="ru-RU" sz="9600" dirty="0"/>
+          </a:p>
+        </p:txBody>
+      </p:sp>
+      <p:pic>
+        <p:nvPicPr>
+          <p:cNvPr id="4" name="Рисунок 3"/>
+          <p:cNvPicPr>
+            <a:picLocks noChangeAspect="1"/>
+          </p:cNvPicPr>
+          <p:nvPr/>
+        </p:nvPicPr>
+        <p:blipFill>
+          <a:blip r:embed="rId2">
+            <a:extLst>
+              <a:ext uri="{28A0092B-C50C-407E-A947-70E740481C1C}">
+                <a14:useLocalDpi xmlns:a14="http://schemas.microsoft.com/office/drawing/2010/main" val="0"/>
+              </a:ext>
+            </a:extLst>
+          </a:blip>
+          <a:stretch>
+            <a:fillRect/>
+          </a:stretch>
+        </p:blipFill>
+        <p:spPr>
+          <a:xfrm>
+            <a:off x="2748825" y="1124744"/>
+            <a:ext cx="3723905" cy="2094697"/>
+          </a:xfrm>
+          <a:prstGeom prst="rect">
+            <a:avLst/>
+          </a:prstGeom>
+        </p:spPr>
+      </p:pic>
+      <p:pic>
+        <p:nvPicPr>
+          <p:cNvPr id="6" name="Рисунок 5"/>
+          <p:cNvPicPr>
+            <a:picLocks noChangeAspect="1"/>
+          </p:cNvPicPr>
+          <p:nvPr/>
+        </p:nvPicPr>
+        <p:blipFill>
+          <a:blip r:embed="rId3" cstate="print">
+            <a:extLst>
+              <a:ext uri="{28A0092B-C50C-407E-A947-70E740481C1C}">
+                <a14:useLocalDpi xmlns:a14="http://schemas.microsoft.com/office/drawing/2010/main" val="0"/>
+              </a:ext>
+            </a:extLst>
+          </a:blip>
+          <a:stretch>
+            <a:fillRect/>
+          </a:stretch>
+        </p:blipFill>
+        <p:spPr>
+          <a:xfrm>
+            <a:off x="641297" y="2804993"/>
+            <a:ext cx="1967450" cy="2952328"/>
+          </a:xfrm>
+          <a:prstGeom prst="rect">
+            <a:avLst/>
+          </a:prstGeom>
+        </p:spPr>
+      </p:pic>
+      <p:sp>
+        <p:nvSpPr>
+          <p:cNvPr id="7" name="TextBox 6"/>
+          <p:cNvSpPr txBox="1"/>
+          <p:nvPr/>
+        </p:nvSpPr>
+        <p:spPr>
+          <a:xfrm>
+            <a:off x="179512" y="5949280"/>
+            <a:ext cx="3672408" cy="369332"/>
+          </a:xfrm>
+          <a:prstGeom prst="rect">
+            <a:avLst/>
+          </a:prstGeom>
+          <a:noFill/>
+        </p:spPr>
+        <p:txBody>
+          <a:bodyPr wrap="square" rtlCol="0">
+            <a:spAutoFit/>
+          </a:bodyPr>
+          <a:lstStyle/>
+          <a:p>
+            <a:r>
+              <a:rPr lang="ru-RU" dirty="0" err="1"/>
+              <a:t>Ласковец</a:t>
+            </a:r>
+            <a:r>
+              <a:rPr lang="ru-RU" dirty="0"/>
+              <a:t> Юлия Вячеславовна</a:t>
+            </a:r>
+            <a:endParaRPr lang="ru-RU" dirty="0"/>
+          </a:p>
+        </p:txBody>
+      </p:sp>
+      <p:sp>
+        <p:nvSpPr>
+          <p:cNvPr id="8" name="TextBox 7"/>
+          <p:cNvSpPr txBox="1"/>
+          <p:nvPr/>
+        </p:nvSpPr>
+        <p:spPr>
+          <a:xfrm>
+            <a:off x="6472730" y="2924944"/>
+            <a:ext cx="2419750" cy="3139321"/>
+          </a:xfrm>
+          <a:prstGeom prst="rect">
+            <a:avLst/>
+          </a:prstGeom>
+          <a:noFill/>
+        </p:spPr>
+        <p:txBody>
+          <a:bodyPr wrap="square" rtlCol="0">
+            <a:spAutoFit/>
+          </a:bodyPr>
+          <a:lstStyle/>
+          <a:p>
+            <a:r>
+              <a:rPr lang="be-BY" dirty="0" smtClean="0"/>
+              <a:t>Фото</a:t>
+            </a:r>
+          </a:p>
+          <a:p>
+            <a:endParaRPr lang="be-BY" dirty="0"/>
+          </a:p>
+          <a:p>
+            <a:endParaRPr lang="be-BY" dirty="0" smtClean="0"/>
+          </a:p>
+          <a:p>
+            <a:endParaRPr lang="be-BY" dirty="0"/>
+          </a:p>
+          <a:p>
+            <a:endParaRPr lang="be-BY" dirty="0" smtClean="0"/>
+          </a:p>
+          <a:p>
+            <a:endParaRPr lang="be-BY" dirty="0"/>
+          </a:p>
+          <a:p>
+            <a:endParaRPr lang="be-BY" dirty="0" smtClean="0"/>
+          </a:p>
+          <a:p>
+            <a:endParaRPr lang="be-BY" dirty="0"/>
+          </a:p>
+          <a:p>
+            <a:endParaRPr lang="be-BY" dirty="0" smtClean="0"/>
+          </a:p>
+          <a:p>
+            <a:endParaRPr lang="be-BY" dirty="0"/>
+          </a:p>
+          <a:p>
+            <a:endParaRPr lang="be-BY" dirty="0" smtClean="0"/>
+          </a:p>
+        </p:txBody>
+      </p:sp>
+      <p:sp>
+        <p:nvSpPr>
+          <p:cNvPr id="9" name="TextBox 8"/>
+          <p:cNvSpPr txBox="1"/>
+          <p:nvPr/>
+        </p:nvSpPr>
+        <p:spPr>
+          <a:xfrm>
+            <a:off x="5508104" y="5745289"/>
+            <a:ext cx="3384376" cy="369332"/>
+          </a:xfrm>
+          <a:prstGeom prst="rect">
+            <a:avLst/>
+          </a:prstGeom>
+          <a:noFill/>
+        </p:spPr>
+        <p:txBody>
+          <a:bodyPr wrap="square" rtlCol="0">
+            <a:spAutoFit/>
+          </a:bodyPr>
+          <a:lstStyle/>
+          <a:p>
+            <a:r>
+              <a:rPr lang="ru-RU" dirty="0"/>
+              <a:t>Кошкина Екатерина Николаевна</a:t>
+            </a:r>
+            <a:endParaRPr lang="ru-RU" dirty="0"/>
+          </a:p>
+        </p:txBody>
+      </p:sp>
+    </p:spTree>
+    <p:extLst>
+      <p:ext uri="{BB962C8B-B14F-4D97-AF65-F5344CB8AC3E}">
+        <p14:creationId xmlns:p14="http://schemas.microsoft.com/office/powerpoint/2010/main" val="3891958108"/>
+      </p:ext>
+    </p:extLst>
+  </p:cSld>
+  <p:clrMapOvr>
+    <a:masterClrMapping/>
+  </p:clrMapOvr>
+  <p:timing>
+    <p:tnLst>
+      <p:par>
+        <p:cTn id="1" dur="indefinite" restart="never" nodeType="tmRoot">
+          <p:childTnLst>
+            <p:seq concurrent="1" nextAc="seek">
+              <p:cTn id="2" dur="indefinite" nodeType="mainSeq">
+                <p:childTnLst>
+                  <p:par>
+                    <p:cTn id="3" fill="hold">
+                      <p:stCondLst>
+                        <p:cond delay="indefinite"/>
+                      </p:stCondLst>
+                      <p:childTnLst>
+                        <p:par>
+                          <p:cTn id="4" fill="hold">
+                            <p:stCondLst>
+                              <p:cond delay="0"/>
+                            </p:stCondLst>
+                            <p:childTnLst>
+                              <p:par>
+                                <p:cTn id="5" presetID="21" presetClass="entr" presetSubtype="1" fill="hold" nodeType="clickEffect">
+                                  <p:stCondLst>
+                                    <p:cond delay="0"/>
+                                  </p:stCondLst>
+                                  <p:childTnLst>
+                                    <p:set>
+                                      <p:cBhvr>
+                                        <p:cTn id="6" dur="1" fill="hold">
+                                          <p:stCondLst>
+                                            <p:cond delay="0"/>
+                                          </p:stCondLst>
+                                        </p:cTn>
+                                        <p:tgtEl>
+                                          <p:spTgt spid="6"/>
+                                        </p:tgtEl>
+                                        <p:attrNameLst>
+                                          <p:attrName>style.visibility</p:attrName>
+                                        </p:attrNameLst>
+                                      </p:cBhvr>
+                                      <p:to>
+                                        <p:strVal val="visible"/>
+                                      </p:to>
+                                    </p:set>
+                                    <p:animEffect transition="in" filter="wheel(1)">
+                                      <p:cBhvr>
+                                        <p:cTn id="7" dur="2000"/>
+                                        <p:tgtEl>
+                                          <p:spTgt spid="6"/>
+                                        </p:tgtEl>
+                                      </p:cBhvr>
+                                    </p:animEffect>
+                                  </p:childTnLst>
+                                </p:cTn>
+                              </p:par>
+                              <p:par>
+                                <p:cTn id="8" presetID="21" presetClass="entr" presetSubtype="1" fill="hold" grpId="0" nodeType="withEffect">
+                                  <p:stCondLst>
+                                    <p:cond delay="0"/>
+                                  </p:stCondLst>
+                                  <p:childTnLst>
+                                    <p:set>
+                                      <p:cBhvr>
+                                        <p:cTn id="9" dur="1" fill="hold">
+                                          <p:stCondLst>
+                                            <p:cond delay="0"/>
+                                          </p:stCondLst>
+                                        </p:cTn>
+                                        <p:tgtEl>
+                                          <p:spTgt spid="7"/>
+                                        </p:tgtEl>
+                                        <p:attrNameLst>
+                                          <p:attrName>style.visibility</p:attrName>
+                                        </p:attrNameLst>
+                                      </p:cBhvr>
+                                      <p:to>
+                                        <p:strVal val="visible"/>
+                                      </p:to>
+                                    </p:set>
+                                    <p:animEffect transition="in" filter="wheel(1)">
+                                      <p:cBhvr>
+                                        <p:cTn id="10" dur="2000"/>
+                                        <p:tgtEl>
+                                          <p:spTgt spid="7"/>
+                                        </p:tgtEl>
+                                      </p:cBhvr>
+                                    </p:animEffect>
+                                  </p:childTnLst>
+                                </p:cTn>
+                              </p:par>
+                              <p:par>
+                                <p:cTn id="11" presetID="21" presetClass="entr" presetSubtype="1" fill="hold" grpId="0" nodeType="withEffect">
+                                  <p:stCondLst>
+                                    <p:cond delay="0"/>
+                                  </p:stCondLst>
+                                  <p:childTnLst>
+                                    <p:set>
+                                      <p:cBhvr>
+                                        <p:cTn id="12" dur="1" fill="hold">
+                                          <p:stCondLst>
+                                            <p:cond delay="0"/>
+                                          </p:stCondLst>
+                                        </p:cTn>
+                                        <p:tgtEl>
+                                          <p:spTgt spid="8"/>
+                                        </p:tgtEl>
+                                        <p:attrNameLst>
+                                          <p:attrName>style.visibility</p:attrName>
+                                        </p:attrNameLst>
+                                      </p:cBhvr>
+                                      <p:to>
+                                        <p:strVal val="visible"/>
+                                      </p:to>
+                                    </p:set>
+                                    <p:animEffect transition="in" filter="wheel(1)">
+                                      <p:cBhvr>
+                                        <p:cTn id="13" dur="2000"/>
+                                        <p:tgtEl>
+                                          <p:spTgt spid="8"/>
+                                        </p:tgtEl>
+                                      </p:cBhvr>
+                                    </p:animEffect>
+                                  </p:childTnLst>
+                                </p:cTn>
+                              </p:par>
+                              <p:par>
+                                <p:cTn id="14" presetID="21" presetClass="entr" presetSubtype="1" fill="hold" grpId="0" nodeType="withEffect">
+                                  <p:stCondLst>
+                                    <p:cond delay="0"/>
+                                  </p:stCondLst>
+                                  <p:childTnLst>
+                                    <p:set>
+                                      <p:cBhvr>
+                                        <p:cTn id="15" dur="1" fill="hold">
+                                          <p:stCondLst>
+                                            <p:cond delay="0"/>
+                                          </p:stCondLst>
+                                        </p:cTn>
+                                        <p:tgtEl>
+                                          <p:spTgt spid="9"/>
+                                        </p:tgtEl>
+                                        <p:attrNameLst>
+                                          <p:attrName>style.visibility</p:attrName>
+                                        </p:attrNameLst>
+                                      </p:cBhvr>
+                                      <p:to>
+                                        <p:strVal val="visible"/>
+                                      </p:to>
+                                    </p:set>
+                                    <p:animEffect transition="in" filter="wheel(1)">
+                                      <p:cBhvr>
+                                        <p:cTn id="16" dur="2000"/>
+                                        <p:tgtEl>
+                                          <p:spTgt spid="9"/>
+                                        </p:tgtEl>
+                                      </p:cBhvr>
+                                    </p:animEffect>
+                                  </p:childTnLst>
+                                </p:cTn>
+                              </p:par>
+                            </p:childTnLst>
+                          </p:cTn>
+                        </p:par>
+                      </p:childTnLst>
+                    </p:cTn>
+                  </p:par>
+                </p:childTnLst>
+              </p:cTn>
+              <p:prevCondLst>
+                <p:cond evt="onPrev" delay="0">
+                  <p:tgtEl>
+                    <p:sldTgt/>
+                  </p:tgtEl>
+                </p:cond>
+              </p:prevCondLst>
+              <p:nextCondLst>
+                <p:cond evt="onNext" delay="0">
+                  <p:tgtEl>
+                    <p:sldTgt/>
+                  </p:tgtEl>
+                </p:cond>
+              </p:nextCondLst>
+            </p:seq>
+          </p:childTnLst>
+        </p:cTn>
+      </p:par>
+    </p:tnLst>
+    <p:bldLst>
+      <p:bldP spid="7" grpId="0"/>
+      <p:bldP spid="8" grpId="0"/>
+      <p:bldP spid="9" grpId="0"/>
+    </p:bldLst>
+  </p:timing>
+</p:sld>
+</file>
+
+<file path=ppt/slides/slide9.xml><?xml version="1.0" encoding="utf-8"?>
+<p:sld xmlns:a="http://schemas.openxmlformats.org/drawingml/2006/main" xmlns:r="http://schemas.openxmlformats.org/officeDocument/2006/relationships" xmlns:p="http://schemas.openxmlformats.org/presentationml/2006/main">
+  <p:cSld>
+    <p:spTree>
+      <p:nvGrpSpPr>
+        <p:cNvPr id="1" name=""/>
+        <p:cNvGrpSpPr/>
+        <p:nvPr/>
+      </p:nvGrpSpPr>
+      <p:grpSpPr>
+        <a:xfrm>
+          <a:off x="0" y="0"/>
+          <a:ext cx="0" cy="0"/>
+          <a:chOff x="0" y="0"/>
+          <a:chExt cx="0" cy="0"/>
+        </a:xfrm>
+      </p:grpSpPr>
+      <p:sp>
+        <p:nvSpPr>
+          <p:cNvPr id="2" name="Заголовок 1"/>
+          <p:cNvSpPr>
+            <a:spLocks noGrp="1"/>
+          </p:cNvSpPr>
+          <p:nvPr>
+            <p:ph type="title"/>
+          </p:nvPr>
+        </p:nvSpPr>
+        <p:spPr/>
+        <p:txBody>
+          <a:bodyPr>
+            <a:normAutofit fontScale="90000"/>
+          </a:bodyPr>
+          <a:lstStyle/>
+          <a:p>
+            <a:r>
+              <a:rPr lang="be-BY" sz="10700" dirty="0" smtClean="0"/>
+              <a:t>История</a:t>
+            </a:r>
+            <a:r>
+              <a:rPr lang="be-BY" dirty="0" smtClean="0"/>
+              <a:t/>
+            </a:r>
+            <a:br>
+              <a:rPr lang="be-BY" dirty="0" smtClean="0"/>
+            </a:br>
+            <a:endParaRPr lang="ru-RU" dirty="0"/>
+          </a:p>
+        </p:txBody>
+      </p:sp>
+      <p:pic>
+        <p:nvPicPr>
+          <p:cNvPr id="1026" name="Picture 2"/>
+          <p:cNvPicPr>
+            <a:picLocks noChangeAspect="1" noChangeArrowheads="1"/>
+          </p:cNvPicPr>
+          <p:nvPr/>
+        </p:nvPicPr>
+        <p:blipFill>
+          <a:blip r:embed="rId2">
+            <a:extLst>
+              <a:ext uri="{28A0092B-C50C-407E-A947-70E740481C1C}">
+                <a14:useLocalDpi xmlns:a14="http://schemas.microsoft.com/office/drawing/2010/main" val="0"/>
+              </a:ext>
+            </a:extLst>
+          </a:blip>
+          <a:srcRect/>
+          <a:stretch>
+            <a:fillRect/>
+          </a:stretch>
+        </p:blipFill>
+        <p:spPr bwMode="auto">
+          <a:xfrm>
+            <a:off x="762388" y="1180799"/>
+            <a:ext cx="2448272" cy="2383843"/>
+          </a:xfrm>
+          <a:prstGeom prst="rect">
+            <a:avLst/>
+          </a:prstGeom>
+          <a:noFill/>
+          <a:ln>
+            <a:noFill/>
+          </a:ln>
+          <a:effectLst/>
+          <a:extLst>
+            <a:ext uri="{909E8E84-426E-40DD-AFC4-6F175D3DCCD1}">
+              <a14:hiddenFill xmlns:a14="http://schemas.microsoft.com/office/drawing/2010/main">
+                <a:solidFill>
+                  <a:schemeClr val="accent1"/>
+                </a:solidFill>
+              </a14:hiddenFill>
+            </a:ext>
+            <a:ext uri="{91240B29-F687-4F45-9708-019B960494DF}">
+              <a14:hiddenLine xmlns:a14="http://schemas.microsoft.com/office/drawing/2010/main" w="9525">
+                <a:solidFill>
+                  <a:schemeClr val="tx1"/>
+                </a:solidFill>
+                <a:miter lim="800000"/>
+                <a:headEnd/>
+                <a:tailEnd/>
+              </a14:hiddenLine>
+            </a:ext>
+            <a:ext uri="{AF507438-7753-43E0-B8FC-AC1667EBCBE1}">
+              <a14:hiddenEffects xmlns:a14="http://schemas.microsoft.com/office/drawing/2010/main">
+                <a:effectLst>
+                  <a:outerShdw dist="35921" dir="2700000" algn="ctr" rotWithShape="0">
+                    <a:schemeClr val="bg2"/>
+                  </a:outerShdw>
+                </a:effectLst>
+              </a14:hiddenEffects>
+            </a:ext>
+          </a:extLst>
+        </p:spPr>
+      </p:pic>
+      <p:pic>
+        <p:nvPicPr>
+          <p:cNvPr id="1027" name="Picture 3"/>
+          <p:cNvPicPr>
+            <a:picLocks noChangeAspect="1" noChangeArrowheads="1"/>
+          </p:cNvPicPr>
+          <p:nvPr/>
+        </p:nvPicPr>
+        <p:blipFill>
+          <a:blip r:embed="rId3">
+            <a:extLst>
+              <a:ext uri="{28A0092B-C50C-407E-A947-70E740481C1C}">
+                <a14:useLocalDpi xmlns:a14="http://schemas.microsoft.com/office/drawing/2010/main" val="0"/>
+              </a:ext>
+            </a:extLst>
+          </a:blip>
+          <a:srcRect/>
+          <a:stretch>
+            <a:fillRect/>
+          </a:stretch>
+        </p:blipFill>
+        <p:spPr bwMode="auto">
+          <a:xfrm>
+            <a:off x="4139952" y="1180799"/>
+            <a:ext cx="3497163" cy="2724106"/>
+          </a:xfrm>
+          <a:prstGeom prst="rect">
+            <a:avLst/>
+          </a:prstGeom>
+          <a:noFill/>
+          <a:ln>
+            <a:noFill/>
+          </a:ln>
+          <a:effectLst/>
+          <a:extLst>
+            <a:ext uri="{909E8E84-426E-40DD-AFC4-6F175D3DCCD1}">
+              <a14:hiddenFill xmlns:a14="http://schemas.microsoft.com/office/drawing/2010/main">
+                <a:solidFill>
+                  <a:schemeClr val="accent1"/>
+                </a:solidFill>
+              </a14:hiddenFill>
+            </a:ext>
+            <a:ext uri="{91240B29-F687-4F45-9708-019B960494DF}">
+              <a14:hiddenLine xmlns:a14="http://schemas.microsoft.com/office/drawing/2010/main" w="9525">
+                <a:solidFill>
+                  <a:schemeClr val="tx1"/>
+                </a:solidFill>
+                <a:miter lim="800000"/>
+                <a:headEnd/>
+                <a:tailEnd/>
+              </a14:hiddenLine>
+            </a:ext>
+            <a:ext uri="{AF507438-7753-43E0-B8FC-AC1667EBCBE1}">
+              <a14:hiddenEffects xmlns:a14="http://schemas.microsoft.com/office/drawing/2010/main">
+                <a:effectLst>
+                  <a:outerShdw dist="35921" dir="2700000" algn="ctr" rotWithShape="0">
+                    <a:schemeClr val="bg2"/>
+                  </a:outerShdw>
+                </a:effectLst>
+              </a14:hiddenEffects>
+            </a:ext>
+          </a:extLst>
+        </p:spPr>
+      </p:pic>
+      <p:pic>
+        <p:nvPicPr>
+          <p:cNvPr id="1028" name="Picture 4"/>
+          <p:cNvPicPr>
+            <a:picLocks noChangeAspect="1" noChangeArrowheads="1"/>
+          </p:cNvPicPr>
+          <p:nvPr/>
+        </p:nvPicPr>
+        <p:blipFill>
+          <a:blip r:embed="rId4">
+            <a:extLst>
+              <a:ext uri="{28A0092B-C50C-407E-A947-70E740481C1C}">
+                <a14:useLocalDpi xmlns:a14="http://schemas.microsoft.com/office/drawing/2010/main" val="0"/>
+              </a:ext>
+            </a:extLst>
+          </a:blip>
+          <a:srcRect/>
+          <a:stretch>
+            <a:fillRect/>
+          </a:stretch>
+        </p:blipFill>
+        <p:spPr bwMode="auto">
+          <a:xfrm>
+            <a:off x="395536" y="4221088"/>
+            <a:ext cx="2815124" cy="2062566"/>
+          </a:xfrm>
+          <a:prstGeom prst="rect">
+            <a:avLst/>
+          </a:prstGeom>
+          <a:noFill/>
+          <a:ln>
+            <a:noFill/>
+          </a:ln>
+          <a:effectLst/>
+          <a:extLst>
+            <a:ext uri="{909E8E84-426E-40DD-AFC4-6F175D3DCCD1}">
+              <a14:hiddenFill xmlns:a14="http://schemas.microsoft.com/office/drawing/2010/main">
+                <a:solidFill>
+                  <a:schemeClr val="accent1"/>
+                </a:solidFill>
+              </a14:hiddenFill>
+            </a:ext>
+            <a:ext uri="{91240B29-F687-4F45-9708-019B960494DF}">
+              <a14:hiddenLine xmlns:a14="http://schemas.microsoft.com/office/drawing/2010/main" w="9525">
+                <a:solidFill>
+                  <a:schemeClr val="tx1"/>
+                </a:solidFill>
+                <a:miter lim="800000"/>
+                <a:headEnd/>
+                <a:tailEnd/>
+              </a14:hiddenLine>
+            </a:ext>
+            <a:ext uri="{AF507438-7753-43E0-B8FC-AC1667EBCBE1}">
+              <a14:hiddenEffects xmlns:a14="http://schemas.microsoft.com/office/drawing/2010/main">
+                <a:effectLst>
+                  <a:outerShdw dist="35921" dir="2700000" algn="ctr" rotWithShape="0">
+                    <a:schemeClr val="bg2"/>
+                  </a:outerShdw>
+                </a:effectLst>
+              </a14:hiddenEffects>
+            </a:ext>
+          </a:extLst>
+        </p:spPr>
+      </p:pic>
+      <p:pic>
+        <p:nvPicPr>
+          <p:cNvPr id="1029" name="Picture 5"/>
+          <p:cNvPicPr>
+            <a:picLocks noChangeAspect="1" noChangeArrowheads="1"/>
+          </p:cNvPicPr>
+          <p:nvPr/>
+        </p:nvPicPr>
+        <p:blipFill>
+          <a:blip r:embed="rId5">
+            <a:extLst>
+              <a:ext uri="{28A0092B-C50C-407E-A947-70E740481C1C}">
+                <a14:useLocalDpi xmlns:a14="http://schemas.microsoft.com/office/drawing/2010/main" val="0"/>
+              </a:ext>
+            </a:extLst>
+          </a:blip>
+          <a:srcRect/>
+          <a:stretch>
+            <a:fillRect/>
+          </a:stretch>
+        </p:blipFill>
+        <p:spPr bwMode="auto">
+          <a:xfrm>
+            <a:off x="4355976" y="4067507"/>
+            <a:ext cx="3808498" cy="2201788"/>
+          </a:xfrm>
+          <a:prstGeom prst="rect">
+            <a:avLst/>
+          </a:prstGeom>
+          <a:noFill/>
+          <a:ln>
+            <a:noFill/>
+          </a:ln>
+          <a:effectLst/>
+          <a:extLst>
+            <a:ext uri="{909E8E84-426E-40DD-AFC4-6F175D3DCCD1}">
+              <a14:hiddenFill xmlns:a14="http://schemas.microsoft.com/office/drawing/2010/main">
+                <a:solidFill>
+                  <a:schemeClr val="accent1"/>
+                </a:solidFill>
+              </a14:hiddenFill>
+            </a:ext>
+            <a:ext uri="{91240B29-F687-4F45-9708-019B960494DF}">
+              <a14:hiddenLine xmlns:a14="http://schemas.microsoft.com/office/drawing/2010/main" w="9525">
+                <a:solidFill>
+                  <a:schemeClr val="tx1"/>
+                </a:solidFill>
+                <a:miter lim="800000"/>
+                <a:headEnd/>
+                <a:tailEnd/>
+              </a14:hiddenLine>
+            </a:ext>
+            <a:ext uri="{AF507438-7753-43E0-B8FC-AC1667EBCBE1}">
+              <a14:hiddenEffects xmlns:a14="http://schemas.microsoft.com/office/drawing/2010/main">
+                <a:effectLst>
+                  <a:outerShdw dist="35921" dir="2700000" algn="ctr" rotWithShape="0">
+                    <a:schemeClr val="bg2"/>
+                  </a:outerShdw>
+                </a:effectLst>
+              </a14:hiddenEffects>
+            </a:ext>
+          </a:extLst>
+        </p:spPr>
+      </p:pic>
+    </p:spTree>
+    <p:extLst>
+      <p:ext uri="{BB962C8B-B14F-4D97-AF65-F5344CB8AC3E}">
+        <p14:creationId xmlns:p14="http://schemas.microsoft.com/office/powerpoint/2010/main" val="504872021"/>
       </p:ext>
     </p:extLst>
   </p:cSld>
